--- a/system-design-101/vi/lessons/sd-13-016/slides/sd-13-016.pptx
+++ b/system-design-101/vi/lessons/sd-13-016/slides/sd-13-016.pptx
@@ -1790,7 +1790,7 @@
         <p:spPr>
           <a:xfrm>
             <a:off x="914400" y="1524000"/>
-            <a:ext cx="8001000" cy="3810000"/>
+            <a:ext cx="8001000" cy="5486400"/>
           </a:xfrm>
           <a:prstGeom prst="rect">
             <a:avLst/>
@@ -1799,17 +1799,17 @@
           <a:ln/>
         </p:spPr>
         <p:txBody>
-          <a:bodyPr wrap="square" lIns="0" tIns="47054" rIns="0" bIns="-47054" rtlCol="0" anchor="t"/>
+          <a:bodyPr wrap="square" lIns="0" tIns="66866" rIns="0" bIns="-66866" rtlCol="0" anchor="t"/>
           <a:lstStyle/>
           <a:p>
             <a:pPr algn="l" indent="0" marL="0">
               <a:lnSpc>
-                <a:spcPts val="6042"/>
+                <a:spcPts val="8586"/>
               </a:lnSpc>
               <a:buNone/>
             </a:pPr>
             <a:r>
-              <a:rPr lang="en-US" sz="5700" dirty="0" spc="2" kern="0">
+              <a:rPr lang="en-US" sz="8100" dirty="0" spc="4" kern="0">
                 <a:solidFill>
                   <a:srgbClr val="F3EEE3"/>
                 </a:solidFill>
@@ -1820,7 +1820,7 @@
               <a:t>Tìm</a:t>
             </a:r>
             <a:r>
-              <a:rPr lang="en-US" sz="5700" dirty="0" spc="9" kern="0">
+              <a:rPr lang="en-US" sz="8100" dirty="0" spc="12" kern="0">
                 <a:solidFill>
                   <a:srgbClr val="F3EEE3"/>
                 </a:solidFill>
@@ -1831,7 +1831,7 @@
               <a:t> đúng</a:t>
             </a:r>
             <a:r>
-              <a:rPr lang="en-US" sz="5700" dirty="0" spc="-10" kern="0">
+              <a:rPr lang="en-US" sz="8100" dirty="0" spc="-11" kern="0">
                 <a:solidFill>
                   <a:srgbClr val="F3EEE3"/>
                 </a:solidFill>
@@ -1842,7 +1842,7 @@
               <a:t> Pod</a:t>
             </a:r>
             <a:r>
-              <a:rPr lang="en-US" sz="5700" dirty="0" spc="-11" kern="0">
+              <a:rPr lang="en-US" sz="8100" dirty="0" spc="-15" kern="0">
                 <a:solidFill>
                   <a:srgbClr val="F3EEE3"/>
                 </a:solidFill>
@@ -1853,7 +1853,7 @@
               <a:t> trong</a:t>
             </a:r>
             <a:r>
-              <a:rPr lang="en-US" sz="5700" dirty="0" spc="-2" kern="0">
+              <a:rPr lang="en-US" sz="8100" dirty="0" spc="0" kern="0">
                 <a:solidFill>
                   <a:srgbClr val="F3EEE3"/>
                 </a:solidFill>
@@ -1864,7 +1864,7 @@
               <a:t> cụm</a:t>
             </a:r>
             <a:r>
-              <a:rPr lang="en-US" sz="5700" dirty="0" spc="-30" kern="0">
+              <a:rPr lang="en-US" sz="8100" dirty="0" spc="-42" kern="0">
                 <a:solidFill>
                   <a:srgbClr val="F3EEE3"/>
                 </a:solidFill>
@@ -1875,7 +1875,7 @@
               <a:t> lớn:</a:t>
             </a:r>
             <a:r>
-              <a:rPr lang="en-US" sz="5700" dirty="0" spc="-12" kern="0">
+              <a:rPr lang="en-US" sz="8100" dirty="0" spc="-14" kern="0">
                 <a:solidFill>
                   <a:srgbClr val="F3EEE3"/>
                 </a:solidFill>
@@ -1886,7 +1886,7 @@
               <a:t> selector</a:t>
             </a:r>
             <a:r>
-              <a:rPr lang="en-US" sz="5700" dirty="0" spc="-67" kern="0">
+              <a:rPr lang="en-US" sz="8100" dirty="0" spc="-87" kern="0">
                 <a:solidFill>
                   <a:srgbClr val="F3EEE3"/>
                 </a:solidFill>
@@ -1897,7 +1897,7 @@
               <a:t> và</a:t>
             </a:r>
             <a:r>
-              <a:rPr lang="en-US" sz="5700" dirty="0" spc="-1" kern="0">
+              <a:rPr lang="en-US" sz="8100" dirty="0" spc="2" kern="0">
                 <a:solidFill>
                   <a:srgbClr val="F3EEE3"/>
                 </a:solidFill>
@@ -1908,7 +1908,7 @@
               <a:t> cách</a:t>
             </a:r>
             <a:r>
-              <a:rPr lang="en-US" sz="5700" dirty="0" spc="-2" kern="0">
+              <a:rPr lang="en-US" sz="8100" dirty="0" spc="-2" kern="0">
                 <a:solidFill>
                   <a:srgbClr val="F3EEE3"/>
                 </a:solidFill>
@@ -1919,7 +1919,7 @@
               <a:t> in</a:t>
             </a:r>
             <a:r>
-              <a:rPr lang="en-US" sz="5700" dirty="0" spc="-36" kern="0">
+              <a:rPr lang="en-US" sz="8100" dirty="0" spc="-48" kern="0">
                 <a:solidFill>
                   <a:srgbClr val="F3EEE3"/>
                 </a:solidFill>
@@ -1930,7 +1930,7 @@
               <a:t> kết</a:t>
             </a:r>
             <a:r>
-              <a:rPr lang="en-US" sz="5700" dirty="0" spc="-4" kern="0">
+              <a:rPr lang="en-US" sz="8100" dirty="0" spc="-3" kern="0">
                 <a:solidFill>
                   <a:srgbClr val="F3EEE3"/>
                 </a:solidFill>
@@ -1941,7 +1941,7 @@
               <a:t> quả</a:t>
             </a:r>
             <a:r>
-              <a:rPr lang="en-US" sz="5700" dirty="0" spc="-3" kern="0">
+              <a:rPr lang="en-US" sz="8100" dirty="0" spc="-1" kern="0">
                 <a:solidFill>
                   <a:srgbClr val="F3EEE3"/>
                 </a:solidFill>
@@ -1952,7 +1952,7 @@
               <a:t> của</a:t>
             </a:r>
             <a:r>
-              <a:rPr lang="en-US" sz="5700" dirty="0" spc="-5" kern="0">
+              <a:rPr lang="en-US" sz="8100" dirty="0" spc="-3" kern="0">
                 <a:solidFill>
                   <a:srgbClr val="F3EEE3"/>
                 </a:solidFill>
@@ -1962,7 +1962,7 @@
               </a:rPr>
               <a:t> kubectl</a:t>
             </a:r>
-            <a:endParaRPr lang="en-US" sz="5700" dirty="0"/>
+            <a:endParaRPr lang="en-US" sz="8100" dirty="0"/>
           </a:p>
         </p:txBody>
       </p:sp>
@@ -1974,7 +1974,7 @@
         </p:nvSpPr>
         <p:spPr>
           <a:xfrm>
-            <a:off x="914400" y="5905500"/>
+            <a:off x="914400" y="7391400"/>
             <a:ext cx="8001000" cy="1047750"/>
           </a:xfrm>
           <a:prstGeom prst="rect">
@@ -2143,7 +2143,7 @@
               <a:t> nhóm</a:t>
             </a:r>
             <a:r>
-              <a:rPr lang="en-US" sz="1650" dirty="0" spc="-3" kern="0">
+              <a:rPr lang="en-US" sz="1650" dirty="0" spc="-4" kern="0">
                 <a:solidFill>
                   <a:srgbClr val="9AA0B5"/>
                 </a:solidFill>
@@ -2151,10 +2151,10 @@
                 <a:ea typeface="Be Vietnam Pro" pitchFamily="34" charset="-122"/>
                 <a:cs typeface="Be Vietnam Pro" pitchFamily="34" charset="-120"/>
               </a:rPr>
-              <a:t> Quan</a:t>
-            </a:r>
-            <a:r>
-              <a:rPr lang="en-US" sz="1650" dirty="0" spc="-9" kern="0">
+              <a:t> DevOps</a:t>
+            </a:r>
+            <a:r>
+              <a:rPr lang="en-US" sz="1650" dirty="0" spc="-7" kern="0">
                 <a:solidFill>
                   <a:srgbClr val="9AA0B5"/>
                 </a:solidFill>
@@ -2162,7 +2162,7 @@
                 <a:ea typeface="Be Vietnam Pro" pitchFamily="34" charset="-122"/>
                 <a:cs typeface="Be Vietnam Pro" pitchFamily="34" charset="-120"/>
               </a:rPr>
-              <a:t> sát</a:t>
+              <a:t> và</a:t>
             </a:r>
             <a:r>
               <a:rPr lang="en-US" sz="1650" dirty="0" spc="3" kern="0">
@@ -2173,18 +2173,7 @@
                 <a:ea typeface="Be Vietnam Pro" pitchFamily="34" charset="-122"/>
                 <a:cs typeface="Be Vietnam Pro" pitchFamily="34" charset="-120"/>
               </a:rPr>
-              <a:t> hệ</a:t>
-            </a:r>
-            <a:r>
-              <a:rPr lang="en-US" sz="1650" dirty="0" spc="1" kern="0">
-                <a:solidFill>
-                  <a:srgbClr val="9AA0B5"/>
-                </a:solidFill>
-                <a:latin typeface="Be Vietnam Pro" pitchFamily="34" charset="0"/>
-                <a:ea typeface="Be Vietnam Pro" pitchFamily="34" charset="-122"/>
-                <a:cs typeface="Be Vietnam Pro" pitchFamily="34" charset="-120"/>
-              </a:rPr>
-              <a:t> thống</a:t>
+              <a:t> CI/CD</a:t>
             </a:r>
             <a:endParaRPr lang="en-US" sz="1650" dirty="0"/>
           </a:p>
@@ -2893,7 +2882,7 @@
         <p:spPr>
           <a:xfrm>
             <a:off x="914400" y="1295400"/>
-            <a:ext cx="16192500" cy="914400"/>
+            <a:ext cx="16192500" cy="1085850"/>
           </a:xfrm>
           <a:prstGeom prst="rect">
             <a:avLst/>
@@ -2909,7 +2898,7 @@
               <a:buNone/>
             </a:pPr>
             <a:r>
-              <a:rPr lang="en-US" sz="5400" dirty="0" spc="-66" kern="0">
+              <a:rPr lang="en-US" sz="6900" dirty="0" spc="-83" kern="0">
                 <a:solidFill>
                   <a:srgbClr val="F3EEE3"/>
                 </a:solidFill>
@@ -2920,7 +2909,7 @@
               <a:t>Tra</a:t>
             </a:r>
             <a:r>
-              <a:rPr lang="en-US" sz="5400" dirty="0" spc="-2" kern="0">
+              <a:rPr lang="en-US" sz="6900" dirty="0" spc="0" kern="0">
                 <a:solidFill>
                   <a:srgbClr val="F3EEE3"/>
                 </a:solidFill>
@@ -2928,10 +2917,10 @@
                 <a:ea typeface="Bricolage Grotesque ExtraBold" pitchFamily="34" charset="-122"/>
                 <a:cs typeface="Bricolage Grotesque ExtraBold" pitchFamily="34" charset="-120"/>
               </a:rPr>
-              <a:t> lại khi</a:t>
-            </a:r>
-            <a:r>
-              <a:rPr lang="en-US" sz="5400" dirty="0" spc="-3" kern="0">
+              <a:t> lại</a:t>
+            </a:r>
+            <a:r>
+              <a:rPr lang="en-US" sz="6900" dirty="0" spc="1" kern="0">
                 <a:solidFill>
                   <a:srgbClr val="F3EEE3"/>
                 </a:solidFill>
@@ -2939,9 +2928,20 @@
                 <a:ea typeface="Bricolage Grotesque ExtraBold" pitchFamily="34" charset="-122"/>
                 <a:cs typeface="Bricolage Grotesque ExtraBold" pitchFamily="34" charset="-120"/>
               </a:rPr>
+              <a:t> khi</a:t>
+            </a:r>
+            <a:r>
+              <a:rPr lang="en-US" sz="6900" dirty="0" spc="-2" kern="0">
+                <a:solidFill>
+                  <a:srgbClr val="F3EEE3"/>
+                </a:solidFill>
+                <a:latin typeface="Bricolage Grotesque ExtraBold" pitchFamily="34" charset="0"/>
+                <a:ea typeface="Bricolage Grotesque ExtraBold" pitchFamily="34" charset="-122"/>
+                <a:cs typeface="Bricolage Grotesque ExtraBold" pitchFamily="34" charset="-120"/>
+              </a:rPr>
               <a:t> cần</a:t>
             </a:r>
-            <a:endParaRPr lang="en-US" sz="5400" dirty="0"/>
+            <a:endParaRPr lang="en-US" sz="6900" dirty="0"/>
           </a:p>
         </p:txBody>
       </p:sp>
@@ -4177,7 +4177,7 @@
         <p:spPr>
           <a:xfrm>
             <a:off x="1524000" y="1866900"/>
-            <a:ext cx="15621000" cy="1333500"/>
+            <a:ext cx="15621000" cy="2190750"/>
           </a:xfrm>
           <a:prstGeom prst="rect">
             <a:avLst/>
@@ -4186,17 +4186,17 @@
           <a:ln/>
         </p:spPr>
         <p:txBody>
-          <a:bodyPr wrap="square" lIns="0" tIns="32004" rIns="0" bIns="-32004" rtlCol="0" anchor="t"/>
+          <a:bodyPr wrap="square" lIns="0" tIns="35052" rIns="0" bIns="-35052" rtlCol="0" anchor="t"/>
           <a:lstStyle/>
           <a:p>
             <a:pPr algn="l" indent="0" marL="0">
               <a:lnSpc>
-                <a:spcPts val="7056"/>
+                <a:spcPts val="7728"/>
               </a:lnSpc>
               <a:buNone/>
             </a:pPr>
             <a:r>
-              <a:rPr lang="en-US" sz="6300" dirty="0" spc="0" kern="0">
+              <a:rPr lang="en-US" sz="6900" dirty="0" spc="2" kern="0">
                 <a:solidFill>
                   <a:srgbClr val="14161C"/>
                 </a:solidFill>
@@ -4207,7 +4207,7 @@
               <a:t>Thu</a:t>
             </a:r>
             <a:r>
-              <a:rPr lang="en-US" sz="6300" dirty="0" spc="5" kern="0">
+              <a:rPr lang="en-US" sz="6900" dirty="0" spc="5" kern="0">
                 <a:solidFill>
                   <a:srgbClr val="14161C"/>
                 </a:solidFill>
@@ -4218,7 +4218,7 @@
               <a:t> hẹp</a:t>
             </a:r>
             <a:r>
-              <a:rPr lang="en-US" sz="6300" dirty="0" spc="-3" kern="0">
+              <a:rPr lang="en-US" sz="6900" dirty="0" spc="-6" kern="0">
                 <a:solidFill>
                   <a:srgbClr val="14161C"/>
                 </a:solidFill>
@@ -4229,7 +4229,7 @@
               <a:t> tập</a:t>
             </a:r>
             <a:r>
-              <a:rPr lang="en-US" sz="6300" dirty="0" spc="-6" kern="0">
+              <a:rPr lang="en-US" sz="6900" dirty="0" spc="-9" kern="0">
                 <a:solidFill>
                   <a:srgbClr val="14161C"/>
                 </a:solidFill>
@@ -4240,7 +4240,7 @@
               <a:t> Pod,</a:t>
             </a:r>
             <a:r>
-              <a:rPr lang="en-US" sz="6300" dirty="0" spc="-20" kern="0">
+              <a:rPr lang="en-US" sz="6900" dirty="0" spc="-21" kern="0">
                 <a:solidFill>
                   <a:srgbClr val="14161C"/>
                 </a:solidFill>
@@ -4251,7 +4251,7 @@
               <a:t> rồi</a:t>
             </a:r>
             <a:r>
-              <a:rPr lang="en-US" sz="6300" dirty="0" spc="1" kern="0">
+              <a:rPr lang="en-US" sz="6900" dirty="0" spc="0" kern="0">
                 <a:solidFill>
                   <a:srgbClr val="14161C"/>
                 </a:solidFill>
@@ -4259,10 +4259,10 @@
                 <a:ea typeface="Bricolage Grotesque ExtraBold" pitchFamily="34" charset="-122"/>
                 <a:cs typeface="Bricolage Grotesque ExtraBold" pitchFamily="34" charset="-120"/>
               </a:rPr>
-              <a:t> chọn thông</a:t>
-            </a:r>
-            <a:r>
-              <a:rPr lang="en-US" sz="6300" dirty="0" spc="3" kern="0">
+              <a:t> chọn</a:t>
+            </a:r>
+            <a:r>
+              <a:rPr lang="en-US" sz="6900" dirty="0" spc="1" kern="0">
                 <a:solidFill>
                   <a:srgbClr val="14161C"/>
                 </a:solidFill>
@@ -4270,10 +4270,10 @@
                 <a:ea typeface="Bricolage Grotesque ExtraBold" pitchFamily="34" charset="-122"/>
                 <a:cs typeface="Bricolage Grotesque ExtraBold" pitchFamily="34" charset="-120"/>
               </a:rPr>
-              <a:t> tin</a:t>
-            </a:r>
-            <a:r>
-              <a:rPr lang="en-US" sz="6300" dirty="0" spc="2" kern="0">
+              <a:t> thông</a:t>
+            </a:r>
+            <a:r>
+              <a:rPr lang="en-US" sz="6900" dirty="0" spc="2" kern="0">
                 <a:solidFill>
                   <a:srgbClr val="14161C"/>
                 </a:solidFill>
@@ -4281,10 +4281,10 @@
                 <a:ea typeface="Bricolage Grotesque ExtraBold" pitchFamily="34" charset="-122"/>
                 <a:cs typeface="Bricolage Grotesque ExtraBold" pitchFamily="34" charset="-120"/>
               </a:rPr>
-              <a:t> in</a:t>
-            </a:r>
-            <a:r>
-              <a:rPr lang="en-US" sz="6300" dirty="0" spc="-28" kern="0">
+              <a:t> tin in</a:t>
+            </a:r>
+            <a:r>
+              <a:rPr lang="en-US" sz="6900" dirty="0" spc="-31" kern="0">
                 <a:solidFill>
                   <a:srgbClr val="14161C"/>
                 </a:solidFill>
@@ -4294,7 +4294,7 @@
               </a:rPr>
               <a:t> ra.</a:t>
             </a:r>
-            <a:endParaRPr lang="en-US" sz="6300" dirty="0"/>
+            <a:endParaRPr lang="en-US" sz="6900" dirty="0"/>
           </a:p>
         </p:txBody>
       </p:sp>
@@ -5267,7 +5267,7 @@
         <p:spPr>
           <a:xfrm>
             <a:off x="914400" y="1333500"/>
-            <a:ext cx="16459200" cy="952500"/>
+            <a:ext cx="16459200" cy="1085850"/>
           </a:xfrm>
           <a:prstGeom prst="rect">
             <a:avLst/>
@@ -5283,7 +5283,7 @@
               <a:buNone/>
             </a:pPr>
             <a:r>
-              <a:rPr lang="en-US" sz="5100" dirty="0" spc="7" kern="0">
+              <a:rPr lang="en-US" sz="6900" dirty="0" spc="6" kern="0">
                 <a:solidFill>
                   <a:srgbClr val="14161C"/>
                 </a:solidFill>
@@ -5294,7 +5294,7 @@
               <a:t>Chọn</a:t>
             </a:r>
             <a:r>
-              <a:rPr lang="en-US" sz="5100" dirty="0" spc="-4" kern="0">
+              <a:rPr lang="en-US" sz="6900" dirty="0" spc="-4" kern="0">
                 <a:solidFill>
                   <a:srgbClr val="14161C"/>
                 </a:solidFill>
@@ -5305,7 +5305,7 @@
               <a:t> namespace,</a:t>
             </a:r>
             <a:r>
-              <a:rPr lang="en-US" sz="5100" dirty="0" spc="-12" kern="0">
+              <a:rPr lang="en-US" sz="6900" dirty="0" spc="-21" kern="0">
                 <a:solidFill>
                   <a:srgbClr val="14161C"/>
                 </a:solidFill>
@@ -5316,7 +5316,7 @@
               <a:t> rồi</a:t>
             </a:r>
             <a:r>
-              <a:rPr lang="en-US" sz="5100" dirty="0" spc="1" kern="0">
+              <a:rPr lang="en-US" sz="6900" dirty="0" spc="0" kern="0">
                 <a:solidFill>
                   <a:srgbClr val="14161C"/>
                 </a:solidFill>
@@ -5327,7 +5327,7 @@
               <a:t> chọn</a:t>
             </a:r>
             <a:r>
-              <a:rPr lang="en-US" sz="5100" dirty="0" spc="2" kern="0">
+              <a:rPr lang="en-US" sz="6900" dirty="0" spc="2" kern="0">
                 <a:solidFill>
                   <a:srgbClr val="14161C"/>
                 </a:solidFill>
@@ -5338,7 +5338,7 @@
               <a:t> theo</a:t>
             </a:r>
             <a:r>
-              <a:rPr lang="en-US" sz="5100" dirty="0" spc="1" kern="0">
+              <a:rPr lang="en-US" sz="6900" dirty="0" spc="1" kern="0">
                 <a:solidFill>
                   <a:srgbClr val="14161C"/>
                 </a:solidFill>
@@ -5348,7 +5348,7 @@
               </a:rPr>
               <a:t> nhãn</a:t>
             </a:r>
-            <a:endParaRPr lang="en-US" sz="5100" dirty="0"/>
+            <a:endParaRPr lang="en-US" sz="6900" dirty="0"/>
           </a:p>
         </p:txBody>
       </p:sp>
@@ -6749,7 +6749,7 @@
         <p:spPr>
           <a:xfrm>
             <a:off x="914400" y="1333500"/>
-            <a:ext cx="16459200" cy="952500"/>
+            <a:ext cx="16459200" cy="1085850"/>
           </a:xfrm>
           <a:prstGeom prst="rect">
             <a:avLst/>
@@ -6765,7 +6765,7 @@
               <a:buNone/>
             </a:pPr>
             <a:r>
-              <a:rPr lang="en-US" sz="5100" dirty="0" spc="1" kern="0">
+              <a:rPr lang="en-US" sz="6900" dirty="0" spc="1" kern="0">
                 <a:solidFill>
                   <a:srgbClr val="F3EEE3"/>
                 </a:solidFill>
@@ -6773,10 +6773,10 @@
                 <a:ea typeface="Bricolage Grotesque ExtraBold" pitchFamily="34" charset="-122"/>
                 <a:cs typeface="Bricolage Grotesque ExtraBold" pitchFamily="34" charset="-120"/>
               </a:rPr>
-              <a:t>Nhãn do</a:t>
-            </a:r>
-            <a:r>
-              <a:rPr lang="en-US" sz="5100" dirty="0" spc="-4" kern="0">
+              <a:t>Nhãn</a:t>
+            </a:r>
+            <a:r>
+              <a:rPr lang="en-US" sz="6900" dirty="0" spc="0" kern="0">
                 <a:solidFill>
                   <a:srgbClr val="F3EEE3"/>
                 </a:solidFill>
@@ -6784,10 +6784,10 @@
                 <a:ea typeface="Bricolage Grotesque ExtraBold" pitchFamily="34" charset="-122"/>
                 <a:cs typeface="Bricolage Grotesque ExtraBold" pitchFamily="34" charset="-120"/>
               </a:rPr>
-              <a:t> bạn</a:t>
-            </a:r>
-            <a:r>
-              <a:rPr lang="en-US" sz="5100" dirty="0" spc="-11" kern="0">
+              <a:t> do</a:t>
+            </a:r>
+            <a:r>
+              <a:rPr lang="en-US" sz="6900" dirty="0" spc="-4" kern="0">
                 <a:solidFill>
                   <a:srgbClr val="F3EEE3"/>
                 </a:solidFill>
@@ -6795,10 +6795,10 @@
                 <a:ea typeface="Bricolage Grotesque ExtraBold" pitchFamily="34" charset="-122"/>
                 <a:cs typeface="Bricolage Grotesque ExtraBold" pitchFamily="34" charset="-120"/>
               </a:rPr>
-              <a:t> gắn,</a:t>
-            </a:r>
-            <a:r>
-              <a:rPr lang="en-US" sz="5100" dirty="0" spc="-42" kern="0">
+              <a:t> bạn</a:t>
+            </a:r>
+            <a:r>
+              <a:rPr lang="en-US" sz="6900" dirty="0" spc="-13" kern="0">
                 <a:solidFill>
                   <a:srgbClr val="F3EEE3"/>
                 </a:solidFill>
@@ -6806,10 +6806,10 @@
                 <a:ea typeface="Bricolage Grotesque ExtraBold" pitchFamily="34" charset="-122"/>
                 <a:cs typeface="Bricolage Grotesque ExtraBold" pitchFamily="34" charset="-120"/>
               </a:rPr>
-              <a:t> trường</a:t>
-            </a:r>
-            <a:r>
-              <a:rPr lang="en-US" sz="5100" dirty="0" spc="0" kern="0">
+              <a:t> gắn,</a:t>
+            </a:r>
+            <a:r>
+              <a:rPr lang="en-US" sz="6900" dirty="0" spc="-58" kern="0">
                 <a:solidFill>
                   <a:srgbClr val="F3EEE3"/>
                 </a:solidFill>
@@ -6817,10 +6817,10 @@
                 <a:ea typeface="Bricolage Grotesque ExtraBold" pitchFamily="34" charset="-122"/>
                 <a:cs typeface="Bricolage Grotesque ExtraBold" pitchFamily="34" charset="-120"/>
               </a:rPr>
-              <a:t> có</a:t>
-            </a:r>
-            <a:r>
-              <a:rPr lang="en-US" sz="5100" dirty="0" spc="-1" kern="0">
+              <a:t> trường</a:t>
+            </a:r>
+            <a:r>
+              <a:rPr lang="en-US" sz="6900" dirty="0" spc="-1" kern="0">
                 <a:solidFill>
                   <a:srgbClr val="F3EEE3"/>
                 </a:solidFill>
@@ -6828,9 +6828,20 @@
                 <a:ea typeface="Bricolage Grotesque ExtraBold" pitchFamily="34" charset="-122"/>
                 <a:cs typeface="Bricolage Grotesque ExtraBold" pitchFamily="34" charset="-120"/>
               </a:rPr>
+              <a:t> có</a:t>
+            </a:r>
+            <a:r>
+              <a:rPr lang="en-US" sz="6900" dirty="0" spc="1" kern="0">
+                <a:solidFill>
+                  <a:srgbClr val="F3EEE3"/>
+                </a:solidFill>
+                <a:latin typeface="Bricolage Grotesque ExtraBold" pitchFamily="34" charset="0"/>
+                <a:ea typeface="Bricolage Grotesque ExtraBold" pitchFamily="34" charset="-122"/>
+                <a:cs typeface="Bricolage Grotesque ExtraBold" pitchFamily="34" charset="-120"/>
+              </a:rPr>
               <a:t> sẵn</a:t>
             </a:r>
-            <a:endParaRPr lang="en-US" sz="5100" dirty="0"/>
+            <a:endParaRPr lang="en-US" sz="6900" dirty="0"/>
           </a:p>
         </p:txBody>
       </p:sp>
@@ -8028,7 +8039,7 @@
         <p:spPr>
           <a:xfrm>
             <a:off x="914400" y="1333500"/>
-            <a:ext cx="16459200" cy="952500"/>
+            <a:ext cx="16459200" cy="1085850"/>
           </a:xfrm>
           <a:prstGeom prst="rect">
             <a:avLst/>
@@ -8044,7 +8055,7 @@
               <a:buNone/>
             </a:pPr>
             <a:r>
-              <a:rPr lang="en-US" sz="5100" dirty="0" spc="3" kern="0">
+              <a:rPr lang="en-US" sz="6900" dirty="0" spc="2" kern="0">
                 <a:solidFill>
                   <a:srgbClr val="14161C"/>
                 </a:solidFill>
@@ -8055,7 +8066,7 @@
               <a:t>In</a:t>
             </a:r>
             <a:r>
-              <a:rPr lang="en-US" sz="5100" dirty="0" spc="8" kern="0">
+              <a:rPr lang="en-US" sz="6900" dirty="0" spc="12" kern="0">
                 <a:solidFill>
                   <a:srgbClr val="14161C"/>
                 </a:solidFill>
@@ -8066,7 +8077,7 @@
               <a:t> đúng</a:t>
             </a:r>
             <a:r>
-              <a:rPr lang="en-US" sz="5100" dirty="0" spc="-7" kern="0">
+              <a:rPr lang="en-US" sz="6900" dirty="0" spc="-11" kern="0">
                 <a:solidFill>
                   <a:srgbClr val="14161C"/>
                 </a:solidFill>
@@ -8077,7 +8088,7 @@
               <a:t> cột</a:t>
             </a:r>
             <a:r>
-              <a:rPr lang="en-US" sz="5100" dirty="0" spc="-3" kern="0">
+              <a:rPr lang="en-US" sz="6900" dirty="0" spc="-4" kern="0">
                 <a:solidFill>
                   <a:srgbClr val="14161C"/>
                 </a:solidFill>
@@ -8088,7 +8099,7 @@
               <a:t> bạn</a:t>
             </a:r>
             <a:r>
-              <a:rPr lang="en-US" sz="5100" dirty="0" spc="-1" kern="0">
+              <a:rPr lang="en-US" sz="6900" dirty="0" spc="-1" kern="0">
                 <a:solidFill>
                   <a:srgbClr val="14161C"/>
                 </a:solidFill>
@@ -8098,7 +8109,7 @@
               </a:rPr>
               <a:t> cần</a:t>
             </a:r>
-            <a:endParaRPr lang="en-US" sz="5100" dirty="0"/>
+            <a:endParaRPr lang="en-US" sz="6900" dirty="0"/>
           </a:p>
         </p:txBody>
       </p:sp>
@@ -9237,7 +9248,7 @@
         <p:spPr>
           <a:xfrm>
             <a:off x="914400" y="1333500"/>
-            <a:ext cx="16459200" cy="952500"/>
+            <a:ext cx="16459200" cy="1085850"/>
           </a:xfrm>
           <a:prstGeom prst="rect">
             <a:avLst/>
@@ -9253,7 +9264,7 @@
               <a:buNone/>
             </a:pPr>
             <a:r>
-              <a:rPr lang="en-US" sz="5100" dirty="0" spc="-2" kern="0">
+              <a:rPr lang="en-US" sz="6900" dirty="0" spc="-2" kern="0">
                 <a:solidFill>
                   <a:srgbClr val="14161C"/>
                 </a:solidFill>
@@ -9264,7 +9275,7 @@
               <a:t>Sắp</a:t>
             </a:r>
             <a:r>
-              <a:rPr lang="en-US" sz="5100" dirty="0" spc="1" kern="0">
+              <a:rPr lang="en-US" sz="6900" dirty="0" spc="2" kern="0">
                 <a:solidFill>
                   <a:srgbClr val="14161C"/>
                 </a:solidFill>
@@ -9272,10 +9283,10 @@
                 <a:ea typeface="Bricolage Grotesque ExtraBold" pitchFamily="34" charset="-122"/>
                 <a:cs typeface="Bricolage Grotesque ExtraBold" pitchFamily="34" charset="-120"/>
               </a:rPr>
-              <a:t> theo số lần</a:t>
-            </a:r>
-            <a:r>
-              <a:rPr lang="en-US" sz="5100" dirty="0" spc="-20" kern="0">
+              <a:t> theo số</a:t>
+            </a:r>
+            <a:r>
+              <a:rPr lang="en-US" sz="6900" dirty="0" spc="0" kern="0">
                 <a:solidFill>
                   <a:srgbClr val="14161C"/>
                 </a:solidFill>
@@ -9283,10 +9294,10 @@
                 <a:ea typeface="Bricolage Grotesque ExtraBold" pitchFamily="34" charset="-122"/>
                 <a:cs typeface="Bricolage Grotesque ExtraBold" pitchFamily="34" charset="-120"/>
               </a:rPr>
-              <a:t> khởi</a:t>
-            </a:r>
-            <a:r>
-              <a:rPr lang="en-US" sz="5100" dirty="0" spc="8" kern="0">
+              <a:t> lần</a:t>
+            </a:r>
+            <a:r>
+              <a:rPr lang="en-US" sz="6900" dirty="0" spc="-26" kern="0">
                 <a:solidFill>
                   <a:srgbClr val="14161C"/>
                 </a:solidFill>
@@ -9294,10 +9305,10 @@
                 <a:ea typeface="Bricolage Grotesque ExtraBold" pitchFamily="34" charset="-122"/>
                 <a:cs typeface="Bricolage Grotesque ExtraBold" pitchFamily="34" charset="-120"/>
               </a:rPr>
-              <a:t> động</a:t>
-            </a:r>
-            <a:r>
-              <a:rPr lang="en-US" sz="5100" dirty="0" spc="2" kern="0">
+              <a:t> khởi</a:t>
+            </a:r>
+            <a:r>
+              <a:rPr lang="en-US" sz="6900" dirty="0" spc="11" kern="0">
                 <a:solidFill>
                   <a:srgbClr val="14161C"/>
                 </a:solidFill>
@@ -9305,9 +9316,20 @@
                 <a:ea typeface="Bricolage Grotesque ExtraBold" pitchFamily="34" charset="-122"/>
                 <a:cs typeface="Bricolage Grotesque ExtraBold" pitchFamily="34" charset="-120"/>
               </a:rPr>
+              <a:t> động</a:t>
+            </a:r>
+            <a:r>
+              <a:rPr lang="en-US" sz="6900" dirty="0" spc="0" kern="0">
+                <a:solidFill>
+                  <a:srgbClr val="14161C"/>
+                </a:solidFill>
+                <a:latin typeface="Bricolage Grotesque ExtraBold" pitchFamily="34" charset="0"/>
+                <a:ea typeface="Bricolage Grotesque ExtraBold" pitchFamily="34" charset="-122"/>
+                <a:cs typeface="Bricolage Grotesque ExtraBold" pitchFamily="34" charset="-120"/>
+              </a:rPr>
               <a:t> lại</a:t>
             </a:r>
-            <a:endParaRPr lang="en-US" sz="5100" dirty="0"/>
+            <a:endParaRPr lang="en-US" sz="6900" dirty="0"/>
           </a:p>
         </p:txBody>
       </p:sp>
@@ -10627,7 +10649,7 @@
         <p:spPr>
           <a:xfrm>
             <a:off x="914400" y="1333500"/>
-            <a:ext cx="16459200" cy="952500"/>
+            <a:ext cx="16459200" cy="1085850"/>
           </a:xfrm>
           <a:prstGeom prst="rect">
             <a:avLst/>
@@ -10643,7 +10665,7 @@
               <a:buNone/>
             </a:pPr>
             <a:r>
-              <a:rPr lang="en-US" sz="5100" dirty="0" spc="-9" kern="0">
+              <a:rPr lang="en-US" sz="6900" dirty="0" spc="-13" kern="0">
                 <a:solidFill>
                   <a:srgbClr val="F3EEE3"/>
                 </a:solidFill>
@@ -10654,7 +10676,7 @@
               <a:t>Selector</a:t>
             </a:r>
             <a:r>
-              <a:rPr lang="en-US" sz="5100" dirty="0" spc="2" kern="0">
+              <a:rPr lang="en-US" sz="6900" dirty="0" spc="2" kern="0">
                 <a:solidFill>
                   <a:srgbClr val="F3EEE3"/>
                 </a:solidFill>
@@ -10662,10 +10684,10 @@
                 <a:ea typeface="Bricolage Grotesque ExtraBold" pitchFamily="34" charset="-122"/>
                 <a:cs typeface="Bricolage Grotesque ExtraBold" pitchFamily="34" charset="-120"/>
               </a:rPr>
-              <a:t> chỉ thu</a:t>
-            </a:r>
-            <a:r>
-              <a:rPr lang="en-US" sz="5100" dirty="0" spc="-6" kern="0">
+              <a:t> thu</a:t>
+            </a:r>
+            <a:r>
+              <a:rPr lang="en-US" sz="6900" dirty="0" spc="-8" kern="0">
                 <a:solidFill>
                   <a:srgbClr val="F3EEE3"/>
                 </a:solidFill>
@@ -10676,7 +10698,7 @@
               <a:t> hẹp,</a:t>
             </a:r>
             <a:r>
-              <a:rPr lang="en-US" sz="5100" dirty="0" spc="1" kern="0">
+              <a:rPr lang="en-US" sz="6900" dirty="0" spc="1" kern="0">
                 <a:solidFill>
                   <a:srgbClr val="F3EEE3"/>
                 </a:solidFill>
@@ -10687,7 +10709,7 @@
               <a:t> không</a:t>
             </a:r>
             <a:r>
-              <a:rPr lang="en-US" sz="5100" dirty="0" spc="0" kern="0">
+              <a:rPr lang="en-US" sz="6900" dirty="0" spc="-1" kern="0">
                 <a:solidFill>
                   <a:srgbClr val="F3EEE3"/>
                 </a:solidFill>
@@ -10698,7 +10720,7 @@
               <a:t> chẩn</a:t>
             </a:r>
             <a:r>
-              <a:rPr lang="en-US" sz="5100" dirty="0" spc="2" kern="0">
+              <a:rPr lang="en-US" sz="6900" dirty="0" spc="3" kern="0">
                 <a:solidFill>
                   <a:srgbClr val="F3EEE3"/>
                 </a:solidFill>
@@ -10708,7 +10730,7 @@
               </a:rPr>
               <a:t> đoán</a:t>
             </a:r>
-            <a:endParaRPr lang="en-US" sz="5100" dirty="0"/>
+            <a:endParaRPr lang="en-US" sz="6900" dirty="0"/>
           </a:p>
         </p:txBody>
       </p:sp>
@@ -12015,7 +12037,7 @@
         <p:spPr>
           <a:xfrm>
             <a:off x="914400" y="1333500"/>
-            <a:ext cx="16459200" cy="952500"/>
+            <a:ext cx="16459200" cy="1085850"/>
           </a:xfrm>
           <a:prstGeom prst="rect">
             <a:avLst/>
@@ -12031,7 +12053,7 @@
               <a:buNone/>
             </a:pPr>
             <a:r>
-              <a:rPr lang="en-US" sz="4800" dirty="0" spc="-14" kern="0">
+              <a:rPr lang="en-US" sz="6900" dirty="0" spc="-20" kern="0">
                 <a:solidFill>
                   <a:srgbClr val="14161C"/>
                 </a:solidFill>
@@ -12042,7 +12064,7 @@
               <a:t>CrashLoopBackOff</a:t>
             </a:r>
             <a:r>
-              <a:rPr lang="en-US" sz="4800" dirty="0" spc="-2" kern="0">
+              <a:rPr lang="en-US" sz="6900" dirty="0" spc="1" kern="0">
                 <a:solidFill>
                   <a:srgbClr val="14161C"/>
                 </a:solidFill>
@@ -12053,7 +12075,7 @@
               <a:t> không</a:t>
             </a:r>
             <a:r>
-              <a:rPr lang="en-US" sz="4800" dirty="0" spc="2" kern="0">
+              <a:rPr lang="en-US" sz="6900" dirty="0" spc="-1" kern="0">
                 <a:solidFill>
                   <a:srgbClr val="14161C"/>
                 </a:solidFill>
@@ -12061,10 +12083,10 @@
                 <a:ea typeface="Bricolage Grotesque ExtraBold" pitchFamily="34" charset="-122"/>
                 <a:cs typeface="Bricolage Grotesque ExtraBold" pitchFamily="34" charset="-120"/>
               </a:rPr>
-              <a:t> phải</a:t>
-            </a:r>
-            <a:r>
-              <a:rPr lang="en-US" sz="4800" dirty="0" spc="-6" kern="0">
+              <a:t> là</a:t>
+            </a:r>
+            <a:r>
+              <a:rPr lang="en-US" sz="6900" dirty="0" spc="5" kern="0">
                 <a:solidFill>
                   <a:srgbClr val="14161C"/>
                 </a:solidFill>
@@ -12072,20 +12094,9 @@
                 <a:ea typeface="Bricolage Grotesque ExtraBold" pitchFamily="34" charset="-122"/>
                 <a:cs typeface="Bricolage Grotesque ExtraBold" pitchFamily="34" charset="-120"/>
               </a:rPr>
-              <a:t> một</a:t>
-            </a:r>
-            <a:r>
-              <a:rPr lang="en-US" sz="4800" dirty="0" spc="1" kern="0">
-                <a:solidFill>
-                  <a:srgbClr val="14161C"/>
-                </a:solidFill>
-                <a:latin typeface="Bricolage Grotesque ExtraBold" pitchFamily="34" charset="0"/>
-                <a:ea typeface="Bricolage Grotesque ExtraBold" pitchFamily="34" charset="-122"/>
-                <a:cs typeface="Bricolage Grotesque ExtraBold" pitchFamily="34" charset="-120"/>
-              </a:rPr>
               <a:t> phase</a:t>
             </a:r>
-            <a:endParaRPr lang="en-US" sz="4800" dirty="0"/>
+            <a:endParaRPr lang="en-US" sz="6900" dirty="0"/>
           </a:p>
         </p:txBody>
       </p:sp>
@@ -13475,7 +13486,7 @@
         <p:spPr>
           <a:xfrm>
             <a:off x="914400" y="1295400"/>
-            <a:ext cx="16459200" cy="952500"/>
+            <a:ext cx="16459200" cy="1085850"/>
           </a:xfrm>
           <a:prstGeom prst="rect">
             <a:avLst/>
@@ -13491,7 +13502,7 @@
               <a:buNone/>
             </a:pPr>
             <a:r>
-              <a:rPr lang="en-US" sz="5100" dirty="0" spc="-2" kern="0">
+              <a:rPr lang="en-US" sz="6900" dirty="0" spc="-2" kern="0">
                 <a:solidFill>
                   <a:srgbClr val="F3EEE3"/>
                 </a:solidFill>
@@ -13502,7 +13513,7 @@
               <a:t>Năm</a:t>
             </a:r>
             <a:r>
-              <a:rPr lang="en-US" sz="5100" dirty="0" spc="1" kern="0">
+              <a:rPr lang="en-US" sz="6900" dirty="0" spc="-1" kern="0">
                 <a:solidFill>
                   <a:srgbClr val="F3EEE3"/>
                 </a:solidFill>
@@ -13513,7 +13524,7 @@
               <a:t> chỗ</a:t>
             </a:r>
             <a:r>
-              <a:rPr lang="en-US" sz="5100" dirty="0" spc="0" kern="0">
+              <a:rPr lang="en-US" sz="6900" dirty="0" spc="2" kern="0">
                 <a:solidFill>
                   <a:srgbClr val="F3EEE3"/>
                 </a:solidFill>
@@ -13524,7 +13535,7 @@
               <a:t> dễ</a:t>
             </a:r>
             <a:r>
-              <a:rPr lang="en-US" sz="5100" dirty="0" spc="5" kern="0">
+              <a:rPr lang="en-US" sz="6900" dirty="0" spc="8" kern="0">
                 <a:solidFill>
                   <a:srgbClr val="F3EEE3"/>
                 </a:solidFill>
@@ -13535,7 +13546,7 @@
               <a:t> hiểu</a:t>
             </a:r>
             <a:r>
-              <a:rPr lang="en-US" sz="5100" dirty="0" spc="0" kern="0">
+              <a:rPr lang="en-US" sz="6900" dirty="0" spc="0" kern="0">
                 <a:solidFill>
                   <a:srgbClr val="F3EEE3"/>
                 </a:solidFill>
@@ -13545,7 +13556,7 @@
               </a:rPr>
               <a:t> nhầm</a:t>
             </a:r>
-            <a:endParaRPr lang="en-US" sz="5100" dirty="0"/>
+            <a:endParaRPr lang="en-US" sz="6900" dirty="0"/>
           </a:p>
         </p:txBody>
       </p:sp>

--- a/system-design-101/vi/lessons/sd-13-016/slides/sd-13-016.pptx
+++ b/system-design-101/vi/lessons/sd-13-016/slides/sd-13-016.pptx
@@ -4655,7 +4655,7 @@
               <a:buNone/>
             </a:pPr>
             <a:r>
-              <a:rPr lang="en-US" sz="2250" dirty="0" spc="1" kern="0">
+              <a:rPr lang="en-US" sz="2550" dirty="0" spc="-3" kern="0">
                 <a:solidFill>
                   <a:srgbClr val="6B6A66"/>
                 </a:solidFill>
@@ -4666,7 +4666,7 @@
               <a:t>Dùng</a:t>
             </a:r>
             <a:r>
-              <a:rPr lang="en-US" sz="2250" dirty="0" spc="5" kern="0">
+              <a:rPr lang="en-US" sz="2550" dirty="0" spc="9" kern="0">
                 <a:solidFill>
                   <a:srgbClr val="6B6A66"/>
                 </a:solidFill>
@@ -4677,7 +4677,7 @@
               <a:t> riêng</a:t>
             </a:r>
             <a:r>
-              <a:rPr lang="en-US" sz="2250" dirty="0" spc="-2" kern="0">
+              <a:rPr lang="en-US" sz="2550" dirty="0" spc="-3" kern="0">
                 <a:solidFill>
                   <a:srgbClr val="6B6A66"/>
                 </a:solidFill>
@@ -4688,7 +4688,7 @@
               <a:t> hoặc</a:t>
             </a:r>
             <a:r>
-              <a:rPr lang="en-US" sz="2250" dirty="0" spc="-32" kern="0">
+              <a:rPr lang="en-US" sz="2550" dirty="0" spc="-32" kern="0">
                 <a:solidFill>
                   <a:srgbClr val="6B6A66"/>
                 </a:solidFill>
@@ -4699,7 +4699,7 @@
               <a:t> kết</a:t>
             </a:r>
             <a:r>
-              <a:rPr lang="en-US" sz="2250" dirty="0" spc="4" kern="0">
+              <a:rPr lang="en-US" sz="2550" dirty="0" spc="-1" kern="0">
                 <a:solidFill>
                   <a:srgbClr val="6B6A66"/>
                 </a:solidFill>
@@ -4710,7 +4710,7 @@
               <a:t> hợp</a:t>
             </a:r>
             <a:r>
-              <a:rPr lang="en-US" sz="2250" dirty="0" spc="11" kern="0">
+              <a:rPr lang="en-US" sz="2550" dirty="0" spc="15" kern="0">
                 <a:solidFill>
                   <a:srgbClr val="6B6A66"/>
                 </a:solidFill>
@@ -4721,7 +4721,7 @@
               <a:t> đều</a:t>
             </a:r>
             <a:r>
-              <a:rPr lang="en-US" sz="2250" dirty="0" spc="9" kern="0">
+              <a:rPr lang="en-US" sz="2550" dirty="0" spc="6" kern="0">
                 <a:solidFill>
                   <a:srgbClr val="6B6A66"/>
                 </a:solidFill>
@@ -4731,7 +4731,7 @@
               </a:rPr>
               <a:t> được.</a:t>
             </a:r>
-            <a:endParaRPr lang="en-US" sz="2250" dirty="0"/>
+            <a:endParaRPr lang="en-US" sz="2550" dirty="0"/>
           </a:p>
         </p:txBody>
       </p:sp>
@@ -6940,12 +6940,12 @@
           <a:ln/>
         </p:spPr>
         <p:txBody>
-          <a:bodyPr wrap="square" lIns="0" tIns="5334" rIns="0" bIns="-5334" rtlCol="0" anchor="t"/>
+          <a:bodyPr wrap="square" lIns="0" tIns="5667" rIns="0" bIns="-5667" rtlCol="0" anchor="t"/>
           <a:lstStyle/>
           <a:p>
-            <a:pPr algn="l" marL="304800" indent="-217761">
+            <a:pPr algn="l" marL="323850" indent="-231371">
               <a:lnSpc>
-                <a:spcPts val="3360"/>
+                <a:spcPts val="3570"/>
               </a:lnSpc>
               <a:spcAft>
                 <a:spcPts val="900"/>
@@ -6955,7 +6955,7 @@
               <a:buChar char="•"/>
             </a:pPr>
             <a:r>
-              <a:rPr lang="en-US" sz="2400" dirty="0" spc="0" kern="0">
+              <a:rPr lang="en-US" sz="2550" dirty="0" spc="-3" kern="0">
                 <a:solidFill>
                   <a:srgbClr val="E4E1D8"/>
                 </a:solidFill>
@@ -6966,7 +6966,7 @@
               <a:t>Do</a:t>
             </a:r>
             <a:r>
-              <a:rPr lang="en-US" sz="2400" dirty="0" spc="6" kern="0">
+              <a:rPr lang="en-US" sz="2550" dirty="0" spc="5" kern="0">
                 <a:solidFill>
                   <a:srgbClr val="E4E1D8"/>
                 </a:solidFill>
@@ -6977,7 +6977,7 @@
               <a:t> người</a:t>
             </a:r>
             <a:r>
-              <a:rPr lang="en-US" sz="2400" dirty="0" spc="4" kern="0">
+              <a:rPr lang="en-US" sz="2550" dirty="0" spc="-1" kern="0">
                 <a:solidFill>
                   <a:srgbClr val="E4E1D8"/>
                 </a:solidFill>
@@ -6988,7 +6988,7 @@
               <a:t> dùng</a:t>
             </a:r>
             <a:r>
-              <a:rPr lang="en-US" sz="2400" dirty="0" spc="-8" kern="0">
+              <a:rPr lang="en-US" sz="2550" dirty="0" spc="-9" kern="0">
                 <a:solidFill>
                   <a:srgbClr val="E4E1D8"/>
                 </a:solidFill>
@@ -6998,19 +6998,19 @@
               </a:rPr>
               <a:t> gắn.</a:t>
             </a:r>
-            <a:endParaRPr lang="en-US" sz="2400" dirty="0"/>
+            <a:endParaRPr lang="en-US" sz="2550" dirty="0"/>
           </a:p>
           <a:p>
-            <a:pPr algn="l" marL="304800" indent="-217761">
+            <a:pPr algn="l" marL="323850" indent="-231371">
               <a:lnSpc>
-                <a:spcPts val="3360"/>
+                <a:spcPts val="3570"/>
               </a:lnSpc>
               <a:buSzPct val="100000"/>
               <a:buFont typeface="Arial"/>
               <a:buChar char="•"/>
             </a:pPr>
             <a:r>
-              <a:rPr lang="en-US" sz="2400" dirty="0" spc="0" kern="0">
+              <a:rPr lang="en-US" sz="2550" dirty="0" spc="0" kern="0">
                 <a:solidFill>
                   <a:srgbClr val="E4E1D8"/>
                 </a:solidFill>
@@ -7021,7 +7021,7 @@
               <a:t>Chọn</a:t>
             </a:r>
             <a:r>
-              <a:rPr lang="en-US" sz="2400" dirty="0" spc="6" kern="0">
+              <a:rPr lang="en-US" sz="2550" dirty="0" spc="6" kern="0">
                 <a:solidFill>
                   <a:srgbClr val="E4E1D8"/>
                 </a:solidFill>
@@ -7032,7 +7032,7 @@
               <a:t> được</a:t>
             </a:r>
             <a:r>
-              <a:rPr lang="en-US" sz="2400" dirty="0" spc="-17" kern="0">
+              <a:rPr lang="en-US" sz="2550" dirty="0" spc="-19" kern="0">
                 <a:solidFill>
                   <a:srgbClr val="E4E1D8"/>
                 </a:solidFill>
@@ -7043,7 +7043,7 @@
               <a:t> trên</a:t>
             </a:r>
             <a:r>
-              <a:rPr lang="en-US" sz="2400" dirty="0" spc="1" kern="0">
+              <a:rPr lang="en-US" sz="2550" dirty="0" spc="0" kern="0">
                 <a:solidFill>
                   <a:srgbClr val="E4E1D8"/>
                 </a:solidFill>
@@ -7054,7 +7054,7 @@
               <a:t> mọi</a:t>
             </a:r>
             <a:r>
-              <a:rPr lang="en-US" sz="2400" dirty="0" spc="-1" kern="0">
+              <a:rPr lang="en-US" sz="2550" dirty="0" spc="-3" kern="0">
                 <a:solidFill>
                   <a:srgbClr val="E4E1D8"/>
                 </a:solidFill>
@@ -7065,7 +7065,7 @@
               <a:t> loại</a:t>
             </a:r>
             <a:r>
-              <a:rPr lang="en-US" sz="2400" dirty="0" spc="-11" kern="0">
+              <a:rPr lang="en-US" sz="2550" dirty="0" spc="-12" kern="0">
                 <a:solidFill>
                   <a:srgbClr val="E4E1D8"/>
                 </a:solidFill>
@@ -7076,7 +7076,7 @@
               <a:t> tài</a:t>
             </a:r>
             <a:r>
-              <a:rPr lang="en-US" sz="2400" dirty="0" spc="-10" kern="0">
+              <a:rPr lang="en-US" sz="2550" dirty="0" spc="-10" kern="0">
                 <a:solidFill>
                   <a:srgbClr val="E4E1D8"/>
                 </a:solidFill>
@@ -7086,7 +7086,7 @@
               </a:rPr>
               <a:t> nguyên.</a:t>
             </a:r>
-            <a:endParaRPr lang="en-US" sz="2400" dirty="0"/>
+            <a:endParaRPr lang="en-US" sz="2550" dirty="0"/>
           </a:p>
         </p:txBody>
       </p:sp>
@@ -7185,12 +7185,12 @@
           <a:ln/>
         </p:spPr>
         <p:txBody>
-          <a:bodyPr wrap="square" lIns="0" tIns="5334" rIns="0" bIns="-5334" rtlCol="0" anchor="t"/>
+          <a:bodyPr wrap="square" lIns="0" tIns="5667" rIns="0" bIns="-5667" rtlCol="0" anchor="t"/>
           <a:lstStyle/>
           <a:p>
-            <a:pPr algn="l" marL="304800" indent="-217761">
+            <a:pPr algn="l" marL="323850" indent="-231371">
               <a:lnSpc>
-                <a:spcPts val="3360"/>
+                <a:spcPts val="3570"/>
               </a:lnSpc>
               <a:spcAft>
                 <a:spcPts val="900"/>
@@ -7200,7 +7200,7 @@
               <a:buChar char="•"/>
             </a:pPr>
             <a:r>
-              <a:rPr lang="en-US" sz="2400" dirty="0" spc="-21" kern="0">
+              <a:rPr lang="en-US" sz="2550" dirty="0" spc="-25" kern="0">
                 <a:solidFill>
                   <a:srgbClr val="E4E1D8"/>
                 </a:solidFill>
@@ -7211,7 +7211,7 @@
               <a:t>Trường</a:t>
             </a:r>
             <a:r>
-              <a:rPr lang="en-US" sz="2400" dirty="0" spc="-1" kern="0">
+              <a:rPr lang="en-US" sz="2550" dirty="0" spc="0" kern="0">
                 <a:solidFill>
                   <a:srgbClr val="E4E1D8"/>
                 </a:solidFill>
@@ -7222,7 +7222,7 @@
               <a:t> có</a:t>
             </a:r>
             <a:r>
-              <a:rPr lang="en-US" sz="2400" dirty="0" spc="-5" kern="0">
+              <a:rPr lang="en-US" sz="2550" dirty="0" spc="-8" kern="0">
                 <a:solidFill>
                   <a:srgbClr val="E4E1D8"/>
                 </a:solidFill>
@@ -7233,7 +7233,7 @@
               <a:t> sẵn</a:t>
             </a:r>
             <a:r>
-              <a:rPr lang="en-US" sz="2400" dirty="0" spc="1" kern="0">
+              <a:rPr lang="en-US" sz="2550" dirty="0" spc="-1" kern="0">
                 <a:solidFill>
                   <a:srgbClr val="E4E1D8"/>
                 </a:solidFill>
@@ -7244,7 +7244,7 @@
               <a:t> của</a:t>
             </a:r>
             <a:r>
-              <a:rPr lang="en-US" sz="2400" dirty="0" spc="13" kern="0">
+              <a:rPr lang="en-US" sz="2550" dirty="0" spc="12" kern="0">
                 <a:solidFill>
                   <a:srgbClr val="E4E1D8"/>
                 </a:solidFill>
@@ -7255,7 +7255,7 @@
               <a:t> đối</a:t>
             </a:r>
             <a:r>
-              <a:rPr lang="en-US" sz="2400" dirty="0" spc="6" kern="0">
+              <a:rPr lang="en-US" sz="2550" dirty="0" spc="6" kern="0">
                 <a:solidFill>
                   <a:srgbClr val="E4E1D8"/>
                 </a:solidFill>
@@ -7265,12 +7265,12 @@
               </a:rPr>
               <a:t> tượng.</a:t>
             </a:r>
-            <a:endParaRPr lang="en-US" sz="2400" dirty="0"/>
+            <a:endParaRPr lang="en-US" sz="2550" dirty="0"/>
           </a:p>
           <a:p>
-            <a:pPr algn="l" marL="304800" indent="-217761">
+            <a:pPr algn="l" marL="323850" indent="-231371">
               <a:lnSpc>
-                <a:spcPts val="3360"/>
+                <a:spcPts val="3570"/>
               </a:lnSpc>
               <a:spcAft>
                 <a:spcPts val="900"/>
@@ -7280,7 +7280,7 @@
               <a:buChar char="•"/>
             </a:pPr>
             <a:r>
-              <a:rPr lang="en-US" sz="2400" dirty="0" spc="-1" kern="0">
+              <a:rPr lang="en-US" sz="2550" dirty="0" spc="-1" kern="0">
                 <a:solidFill>
                   <a:srgbClr val="E4E1D8"/>
                 </a:solidFill>
@@ -7291,7 +7291,7 @@
               <a:t>Mỗi</a:t>
             </a:r>
             <a:r>
-              <a:rPr lang="en-US" sz="2400" dirty="0" spc="-2" kern="0">
+              <a:rPr lang="en-US" sz="2550" dirty="0" spc="-2" kern="0">
                 <a:solidFill>
                   <a:srgbClr val="E4E1D8"/>
                 </a:solidFill>
@@ -7302,7 +7302,7 @@
               <a:t> loại</a:t>
             </a:r>
             <a:r>
-              <a:rPr lang="en-US" sz="2400" dirty="0" spc="0" kern="0">
+              <a:rPr lang="en-US" sz="2550" dirty="0" spc="0" kern="0">
                 <a:solidFill>
                   <a:srgbClr val="E4E1D8"/>
                 </a:solidFill>
@@ -7310,10 +7310,10 @@
                 <a:ea typeface="Be Vietnam Pro" pitchFamily="34" charset="-122"/>
                 <a:cs typeface="Be Vietnam Pro" pitchFamily="34" charset="-120"/>
               </a:rPr>
-              <a:t> chỉ</a:t>
-            </a:r>
-            <a:r>
-              <a:rPr lang="en-US" sz="2400" dirty="0" spc="1" kern="0">
+              <a:t> chỉ hỗ</a:t>
+            </a:r>
+            <a:r>
+              <a:rPr lang="en-US" sz="2550" dirty="0" spc="-25" kern="0">
                 <a:solidFill>
                   <a:srgbClr val="E4E1D8"/>
                 </a:solidFill>
@@ -7321,10 +7321,10 @@
                 <a:ea typeface="Be Vietnam Pro" pitchFamily="34" charset="-122"/>
                 <a:cs typeface="Be Vietnam Pro" pitchFamily="34" charset="-120"/>
               </a:rPr>
-              <a:t> hỗ</a:t>
-            </a:r>
-            <a:r>
-              <a:rPr lang="en-US" sz="2400" dirty="0" spc="-22" kern="0">
+              <a:t> trợ</a:t>
+            </a:r>
+            <a:r>
+              <a:rPr lang="en-US" sz="2550" dirty="0" spc="-5" kern="0">
                 <a:solidFill>
                   <a:srgbClr val="E4E1D8"/>
                 </a:solidFill>
@@ -7332,10 +7332,10 @@
                 <a:ea typeface="Be Vietnam Pro" pitchFamily="34" charset="-122"/>
                 <a:cs typeface="Be Vietnam Pro" pitchFamily="34" charset="-120"/>
               </a:rPr>
-              <a:t> trợ</a:t>
-            </a:r>
-            <a:r>
-              <a:rPr lang="en-US" sz="2400" dirty="0" spc="-2" kern="0">
+              <a:t> một</a:t>
+            </a:r>
+            <a:r>
+              <a:rPr lang="en-US" sz="2550" dirty="0" spc="-11" kern="0">
                 <a:solidFill>
                   <a:srgbClr val="E4E1D8"/>
                 </a:solidFill>
@@ -7343,10 +7343,10 @@
                 <a:ea typeface="Be Vietnam Pro" pitchFamily="34" charset="-122"/>
                 <a:cs typeface="Be Vietnam Pro" pitchFamily="34" charset="-120"/>
               </a:rPr>
-              <a:t> một</a:t>
-            </a:r>
-            <a:r>
-              <a:rPr lang="en-US" sz="2400" dirty="0" spc="-9" kern="0">
+              <a:t> số</a:t>
+            </a:r>
+            <a:r>
+              <a:rPr lang="en-US" sz="2550" dirty="0" spc="5" kern="0">
                 <a:solidFill>
                   <a:srgbClr val="E4E1D8"/>
                 </a:solidFill>
@@ -7354,32 +7354,21 @@
                 <a:ea typeface="Be Vietnam Pro" pitchFamily="34" charset="-122"/>
                 <a:cs typeface="Be Vietnam Pro" pitchFamily="34" charset="-120"/>
               </a:rPr>
-              <a:t> số</a:t>
-            </a:r>
-            <a:r>
-              <a:rPr lang="en-US" sz="2400" dirty="0" spc="6" kern="0">
-                <a:solidFill>
-                  <a:srgbClr val="E4E1D8"/>
-                </a:solidFill>
-                <a:latin typeface="Be Vietnam Pro" pitchFamily="34" charset="0"/>
-                <a:ea typeface="Be Vietnam Pro" pitchFamily="34" charset="-122"/>
-                <a:cs typeface="Be Vietnam Pro" pitchFamily="34" charset="-120"/>
-              </a:rPr>
               <a:t> trường.</a:t>
             </a:r>
-            <a:endParaRPr lang="en-US" sz="2400" dirty="0"/>
+            <a:endParaRPr lang="en-US" sz="2550" dirty="0"/>
           </a:p>
           <a:p>
-            <a:pPr algn="l" marL="304800" indent="-217761">
+            <a:pPr algn="l" marL="323850" indent="-231371">
               <a:lnSpc>
-                <a:spcPts val="3360"/>
+                <a:spcPts val="3570"/>
               </a:lnSpc>
               <a:buSzPct val="100000"/>
               <a:buFont typeface="Arial"/>
               <a:buChar char="•"/>
             </a:pPr>
             <a:r>
-              <a:rPr lang="en-US" sz="2400" dirty="0" spc="-38" kern="0">
+              <a:rPr lang="en-US" sz="2550" dirty="0" spc="-39" kern="0">
                 <a:solidFill>
                   <a:srgbClr val="E4E1D8"/>
                 </a:solidFill>
@@ -7390,7 +7379,7 @@
               <a:t>Với</a:t>
             </a:r>
             <a:r>
-              <a:rPr lang="en-US" sz="2400" dirty="0" spc="-14" kern="0">
+              <a:rPr lang="en-US" sz="2550" dirty="0" spc="-15" kern="0">
                 <a:solidFill>
                   <a:srgbClr val="E4E1D8"/>
                 </a:solidFill>
@@ -7401,7 +7390,7 @@
               <a:t> Pod</a:t>
             </a:r>
             <a:r>
-              <a:rPr lang="en-US" sz="2400" dirty="0" spc="0" kern="0">
+              <a:rPr lang="en-US" sz="2550" dirty="0" spc="0" kern="0">
                 <a:solidFill>
                   <a:srgbClr val="E4E1D8"/>
                 </a:solidFill>
@@ -7412,7 +7401,7 @@
               <a:t> có</a:t>
             </a:r>
             <a:r>
-              <a:rPr lang="en-US" sz="2400" dirty="0" spc="-11" kern="0">
+              <a:rPr lang="en-US" sz="2550" dirty="0" spc="-10" kern="0">
                 <a:solidFill>
                   <a:srgbClr val="E4E1D8"/>
                 </a:solidFill>
@@ -7422,7 +7411,7 @@
               </a:rPr>
               <a:t> status.phase.</a:t>
             </a:r>
-            <a:endParaRPr lang="en-US" sz="2400" dirty="0"/>
+            <a:endParaRPr lang="en-US" sz="2550" dirty="0"/>
           </a:p>
         </p:txBody>
       </p:sp>
@@ -7478,7 +7467,7 @@
               <a:buNone/>
             </a:pPr>
             <a:r>
-              <a:rPr lang="en-US" sz="2400" b="1" dirty="0" spc="-7" kern="0">
+              <a:rPr lang="en-US" sz="2550" b="1" dirty="0" spc="-6" kern="0">
                 <a:solidFill>
                   <a:srgbClr val="FFB454"/>
                 </a:solidFill>
@@ -7489,7 +7478,7 @@
               <a:t>--field-selector</a:t>
             </a:r>
             <a:r>
-              <a:rPr lang="en-US" sz="2400" b="1" dirty="0" spc="-9" kern="0">
+              <a:rPr lang="en-US" sz="2550" b="1" dirty="0" spc="-9" kern="0">
                 <a:solidFill>
                   <a:srgbClr val="FFB454"/>
                 </a:solidFill>
@@ -7499,7 +7488,7 @@
               </a:rPr>
               <a:t> status.phase=Pending</a:t>
             </a:r>
-            <a:endParaRPr lang="en-US" sz="2400" dirty="0"/>
+            <a:endParaRPr lang="en-US" sz="2550" dirty="0"/>
           </a:p>
         </p:txBody>
       </p:sp>
@@ -8208,17 +8197,17 @@
           <a:ln/>
         </p:spPr>
         <p:txBody>
-          <a:bodyPr wrap="square" lIns="0" tIns="5334" rIns="0" bIns="-5334" rtlCol="0" anchor="t"/>
+          <a:bodyPr wrap="square" lIns="0" tIns="5667" rIns="0" bIns="-5667" rtlCol="0" anchor="t"/>
           <a:lstStyle/>
           <a:p>
             <a:pPr algn="l" indent="0" marL="0">
               <a:lnSpc>
-                <a:spcPts val="3360"/>
+                <a:spcPts val="3570"/>
               </a:lnSpc>
               <a:buNone/>
             </a:pPr>
             <a:r>
-              <a:rPr lang="en-US" sz="2400" dirty="0" spc="0" kern="0">
+              <a:rPr lang="en-US" sz="2550" dirty="0" spc="0" kern="0">
                 <a:solidFill>
                   <a:srgbClr val="14161C"/>
                 </a:solidFill>
@@ -8229,7 +8218,7 @@
               <a:t>Thêm</a:t>
             </a:r>
             <a:r>
-              <a:rPr lang="en-US" sz="2400" dirty="0" spc="-5" kern="0">
+              <a:rPr lang="en-US" sz="2550" dirty="0" spc="-6" kern="0">
                 <a:solidFill>
                   <a:srgbClr val="14161C"/>
                 </a:solidFill>
@@ -8240,7 +8229,7 @@
               <a:t> cột</a:t>
             </a:r>
             <a:r>
-              <a:rPr lang="en-US" sz="2400" dirty="0" spc="-1" kern="0">
+              <a:rPr lang="en-US" sz="2550" dirty="0" spc="-2" kern="0">
                 <a:solidFill>
                   <a:srgbClr val="14161C"/>
                 </a:solidFill>
@@ -8251,7 +8240,7 @@
               <a:t> node</a:t>
             </a:r>
             <a:r>
-              <a:rPr lang="en-US" sz="2400" dirty="0" spc="-15" kern="0">
+              <a:rPr lang="en-US" sz="2550" dirty="0" spc="-19" kern="0">
                 <a:solidFill>
                   <a:srgbClr val="14161C"/>
                 </a:solidFill>
@@ -8262,7 +8251,7 @@
               <a:t> và</a:t>
             </a:r>
             <a:r>
-              <a:rPr lang="en-US" sz="2400" dirty="0" spc="-2" kern="0">
+              <a:rPr lang="en-US" sz="2550" dirty="0" spc="1" kern="0">
                 <a:solidFill>
                   <a:srgbClr val="14161C"/>
                 </a:solidFill>
@@ -8272,7 +8261,7 @@
               </a:rPr>
               <a:t> IP.</a:t>
             </a:r>
-            <a:endParaRPr lang="en-US" sz="2400" dirty="0"/>
+            <a:endParaRPr lang="en-US" sz="2550" dirty="0"/>
           </a:p>
         </p:txBody>
       </p:sp>
@@ -8371,17 +8360,17 @@
           <a:ln/>
         </p:spPr>
         <p:txBody>
-          <a:bodyPr wrap="square" lIns="0" tIns="5334" rIns="0" bIns="-5334" rtlCol="0" anchor="t"/>
+          <a:bodyPr wrap="square" lIns="0" tIns="5667" rIns="0" bIns="-5667" rtlCol="0" anchor="t"/>
           <a:lstStyle/>
           <a:p>
             <a:pPr algn="l" indent="0" marL="0">
               <a:lnSpc>
-                <a:spcPts val="3360"/>
+                <a:spcPts val="3570"/>
               </a:lnSpc>
               <a:buNone/>
             </a:pPr>
             <a:r>
-              <a:rPr lang="en-US" sz="2400" dirty="0" spc="-25" kern="0">
+              <a:rPr lang="en-US" sz="2550" dirty="0" spc="-26" kern="0">
                 <a:solidFill>
                   <a:srgbClr val="14161C"/>
                 </a:solidFill>
@@ -8392,7 +8381,7 @@
               <a:t>Trích</a:t>
             </a:r>
             <a:r>
-              <a:rPr lang="en-US" sz="2400" dirty="0" spc="3" kern="0">
+              <a:rPr lang="en-US" sz="2550" dirty="0" spc="-1" kern="0">
                 <a:solidFill>
                   <a:srgbClr val="14161C"/>
                 </a:solidFill>
@@ -8403,7 +8392,7 @@
               <a:t> đúng</a:t>
             </a:r>
             <a:r>
-              <a:rPr lang="en-US" sz="2400" dirty="0" spc="6" kern="0">
+              <a:rPr lang="en-US" sz="2550" dirty="0" spc="4" kern="0">
                 <a:solidFill>
                   <a:srgbClr val="14161C"/>
                 </a:solidFill>
@@ -8414,7 +8403,7 @@
               <a:t> trường,</a:t>
             </a:r>
             <a:r>
-              <a:rPr lang="en-US" sz="2400" dirty="0" spc="0" kern="0">
+              <a:rPr lang="en-US" sz="2550" dirty="0" spc="-1" kern="0">
                 <a:solidFill>
                   <a:srgbClr val="14161C"/>
                 </a:solidFill>
@@ -8425,7 +8414,7 @@
               <a:t> ví</a:t>
             </a:r>
             <a:r>
-              <a:rPr lang="en-US" sz="2400" dirty="0" spc="3" kern="0">
+              <a:rPr lang="en-US" sz="2550" dirty="0" spc="-2" kern="0">
                 <a:solidFill>
                   <a:srgbClr val="14161C"/>
                 </a:solidFill>
@@ -8436,7 +8425,7 @@
               <a:t> dụ</a:t>
             </a:r>
             <a:r>
-              <a:rPr lang="en-US" sz="2400" dirty="0" spc="-5" kern="0">
+              <a:rPr lang="en-US" sz="2550" dirty="0" spc="-6" kern="0">
                 <a:solidFill>
                   <a:srgbClr val="14161C"/>
                 </a:solidFill>
@@ -8446,7 +8435,7 @@
               </a:rPr>
               <a:t> image.</a:t>
             </a:r>
-            <a:endParaRPr lang="en-US" sz="2400" dirty="0"/>
+            <a:endParaRPr lang="en-US" sz="2550" dirty="0"/>
           </a:p>
         </p:txBody>
       </p:sp>
@@ -8545,17 +8534,17 @@
           <a:ln/>
         </p:spPr>
         <p:txBody>
-          <a:bodyPr wrap="square" lIns="0" tIns="5334" rIns="0" bIns="-5334" rtlCol="0" anchor="t"/>
+          <a:bodyPr wrap="square" lIns="0" tIns="5667" rIns="0" bIns="-5667" rtlCol="0" anchor="t"/>
           <a:lstStyle/>
           <a:p>
             <a:pPr algn="l" indent="0" marL="0">
               <a:lnSpc>
-                <a:spcPts val="3360"/>
+                <a:spcPts val="3570"/>
               </a:lnSpc>
               <a:buNone/>
             </a:pPr>
             <a:r>
-              <a:rPr lang="en-US" sz="2400" dirty="0" spc="-25" kern="0">
+              <a:rPr lang="en-US" sz="2550" dirty="0" spc="-26" kern="0">
                 <a:solidFill>
                   <a:srgbClr val="14161C"/>
                 </a:solidFill>
@@ -8566,7 +8555,7 @@
               <a:t>Trích</a:t>
             </a:r>
             <a:r>
-              <a:rPr lang="en-US" sz="2400" dirty="0" spc="3" kern="0">
+              <a:rPr lang="en-US" sz="2550" dirty="0" spc="-1" kern="0">
                 <a:solidFill>
                   <a:srgbClr val="14161C"/>
                 </a:solidFill>
@@ -8577,7 +8566,7 @@
               <a:t> đúng</a:t>
             </a:r>
             <a:r>
-              <a:rPr lang="en-US" sz="2400" dirty="0" spc="6" kern="0">
+              <a:rPr lang="en-US" sz="2550" dirty="0" spc="4" kern="0">
                 <a:solidFill>
                   <a:srgbClr val="14161C"/>
                 </a:solidFill>
@@ -8588,7 +8577,7 @@
               <a:t> trường;</a:t>
             </a:r>
             <a:r>
-              <a:rPr lang="en-US" sz="2400" dirty="0" spc="2" kern="0">
+              <a:rPr lang="en-US" sz="2550" dirty="0" spc="0" kern="0">
                 <a:solidFill>
                   <a:srgbClr val="14161C"/>
                 </a:solidFill>
@@ -8599,7 +8588,7 @@
               <a:t> danh</a:t>
             </a:r>
             <a:r>
-              <a:rPr lang="en-US" sz="2400" dirty="0" spc="-6" kern="0">
+              <a:rPr lang="en-US" sz="2550" dirty="0" spc="-6" kern="0">
                 <a:solidFill>
                   <a:srgbClr val="14161C"/>
                 </a:solidFill>
@@ -8610,7 +8599,7 @@
               <a:t> sách</a:t>
             </a:r>
             <a:r>
-              <a:rPr lang="en-US" sz="2400" dirty="0" spc="-12" kern="0">
+              <a:rPr lang="en-US" sz="2550" dirty="0" spc="-15" kern="0">
                 <a:solidFill>
                   <a:srgbClr val="14161C"/>
                 </a:solidFill>
@@ -8621,7 +8610,7 @@
               <a:t> bắt</a:t>
             </a:r>
             <a:r>
-              <a:rPr lang="en-US" sz="2400" dirty="0" spc="13" kern="0">
+              <a:rPr lang="en-US" sz="2550" dirty="0" spc="15" kern="0">
                 <a:solidFill>
                   <a:srgbClr val="14161C"/>
                 </a:solidFill>
@@ -8632,7 +8621,7 @@
               <a:t> đầu</a:t>
             </a:r>
             <a:r>
-              <a:rPr lang="en-US" sz="2400" dirty="0" spc="-4" kern="0">
+              <a:rPr lang="en-US" sz="2550" dirty="0" spc="-4" kern="0">
                 <a:solidFill>
                   <a:srgbClr val="14161C"/>
                 </a:solidFill>
@@ -8642,7 +8631,7 @@
               </a:rPr>
               <a:t> .items[*].</a:t>
             </a:r>
-            <a:endParaRPr lang="en-US" sz="2400" dirty="0"/>
+            <a:endParaRPr lang="en-US" sz="2550" dirty="0"/>
           </a:p>
         </p:txBody>
       </p:sp>
@@ -9385,7 +9374,7 @@
               <a:buNone/>
             </a:pPr>
             <a:r>
-              <a:rPr lang="en-US" sz="2250" dirty="0" spc="-12" kern="0">
+              <a:rPr lang="en-US" sz="2550" dirty="0" spc="-14" kern="0">
                 <a:solidFill>
                   <a:srgbClr val="14161C"/>
                 </a:solidFill>
@@ -9395,7 +9384,7 @@
               </a:rPr>
               <a:t>--sort-by='.status.containerStatuses[0].restartCount'</a:t>
             </a:r>
-            <a:endParaRPr lang="en-US" sz="2250" dirty="0"/>
+            <a:endParaRPr lang="en-US" sz="2550" dirty="0"/>
           </a:p>
         </p:txBody>
       </p:sp>
@@ -9505,17 +9494,17 @@
           <a:ln/>
         </p:spPr>
         <p:txBody>
-          <a:bodyPr wrap="square" lIns="0" tIns="8557" rIns="0" bIns="-8557" rtlCol="0" anchor="t"/>
+          <a:bodyPr wrap="square" lIns="0" tIns="9700" rIns="0" bIns="-9700" rtlCol="0" anchor="t"/>
           <a:lstStyle/>
           <a:p>
             <a:pPr algn="l" indent="0" marL="0">
               <a:lnSpc>
-                <a:spcPts val="3038"/>
+                <a:spcPts val="3443"/>
               </a:lnSpc>
               <a:buNone/>
             </a:pPr>
             <a:r>
-              <a:rPr lang="en-US" sz="2250" dirty="0" spc="-2" kern="0">
+              <a:rPr lang="en-US" sz="2550" dirty="0" spc="2" kern="0">
                 <a:solidFill>
                   <a:srgbClr val="14161C"/>
                 </a:solidFill>
@@ -9526,7 +9515,7 @@
               <a:t>Ví</a:t>
             </a:r>
             <a:r>
-              <a:rPr lang="en-US" sz="2250" dirty="0" spc="5" kern="0">
+              <a:rPr lang="en-US" sz="2550" dirty="0" spc="0" kern="0">
                 <a:solidFill>
                   <a:srgbClr val="14161C"/>
                 </a:solidFill>
@@ -9537,7 +9526,7 @@
               <a:t> dụ:</a:t>
             </a:r>
             <a:r>
-              <a:rPr lang="en-US" sz="2250" dirty="0" spc="-2" kern="0">
+              <a:rPr lang="en-US" sz="2550" dirty="0" spc="-11" kern="0">
                 <a:solidFill>
                   <a:srgbClr val="14161C"/>
                 </a:solidFill>
@@ -9548,7 +9537,7 @@
               <a:t> số</a:t>
             </a:r>
             <a:r>
-              <a:rPr lang="en-US" sz="2250" dirty="0" spc="0" kern="0">
+              <a:rPr lang="en-US" sz="2550" dirty="0" spc="0" kern="0">
                 <a:solidFill>
                   <a:srgbClr val="14161C"/>
                 </a:solidFill>
@@ -9559,7 +9548,7 @@
               <a:t> lần khởi</a:t>
             </a:r>
             <a:r>
-              <a:rPr lang="en-US" sz="2250" dirty="0" spc="11" kern="0">
+              <a:rPr lang="en-US" sz="2550" dirty="0" spc="10" kern="0">
                 <a:solidFill>
                   <a:srgbClr val="14161C"/>
                 </a:solidFill>
@@ -9570,7 +9559,7 @@
               <a:t> động</a:t>
             </a:r>
             <a:r>
-              <a:rPr lang="en-US" sz="2250" dirty="0" spc="-2" kern="0">
+              <a:rPr lang="en-US" sz="2550" dirty="0" spc="0" kern="0">
                 <a:solidFill>
                   <a:srgbClr val="14161C"/>
                 </a:solidFill>
@@ -9580,7 +9569,7 @@
               </a:rPr>
               <a:t> lại</a:t>
             </a:r>
-            <a:endParaRPr lang="en-US" sz="2250" dirty="0"/>
+            <a:endParaRPr lang="en-US" sz="2550" dirty="0"/>
           </a:p>
         </p:txBody>
       </p:sp>
@@ -9715,17 +9704,17 @@
           <a:ln/>
         </p:spPr>
         <p:txBody>
-          <a:bodyPr wrap="square" lIns="0" tIns="8557" rIns="0" bIns="-8557" rtlCol="0" anchor="t"/>
+          <a:bodyPr wrap="square" lIns="0" tIns="9700" rIns="0" bIns="-9700" rtlCol="0" anchor="t"/>
           <a:lstStyle/>
           <a:p>
             <a:pPr algn="l" indent="0" marL="0">
               <a:lnSpc>
-                <a:spcPts val="3038"/>
+                <a:spcPts val="3443"/>
               </a:lnSpc>
               <a:buNone/>
             </a:pPr>
             <a:r>
-              <a:rPr lang="en-US" sz="2250" dirty="0" spc="-5" kern="0">
+              <a:rPr lang="en-US" sz="2550" dirty="0" spc="-4" kern="0">
                 <a:solidFill>
                   <a:srgbClr val="14161C"/>
                 </a:solidFill>
@@ -9736,7 +9725,7 @@
               <a:t>Theo</a:t>
             </a:r>
             <a:r>
-              <a:rPr lang="en-US" sz="2250" dirty="0" spc="7" kern="0">
+              <a:rPr lang="en-US" sz="2550" dirty="0" spc="5" kern="0">
                 <a:solidFill>
                   <a:srgbClr val="14161C"/>
                 </a:solidFill>
@@ -9747,7 +9736,7 @@
               <a:t> đường</a:t>
             </a:r>
             <a:r>
-              <a:rPr lang="en-US" sz="2250" dirty="0" spc="1" kern="0">
+              <a:rPr lang="en-US" sz="2550" dirty="0" spc="1" kern="0">
                 <a:solidFill>
                   <a:srgbClr val="14161C"/>
                 </a:solidFill>
@@ -9758,7 +9747,7 @@
               <a:t> dẫn</a:t>
             </a:r>
             <a:r>
-              <a:rPr lang="en-US" sz="2250" dirty="0" spc="5" kern="0">
+              <a:rPr lang="en-US" sz="2550" dirty="0" spc="5" kern="0">
                 <a:solidFill>
                   <a:srgbClr val="14161C"/>
                 </a:solidFill>
@@ -9768,7 +9757,7 @@
               </a:rPr>
               <a:t> trường</a:t>
             </a:r>
-            <a:endParaRPr lang="en-US" sz="2250" dirty="0"/>
+            <a:endParaRPr lang="en-US" sz="2550" dirty="0"/>
           </a:p>
         </p:txBody>
       </p:sp>
@@ -9914,17 +9903,17 @@
           <a:ln/>
         </p:spPr>
         <p:txBody>
-          <a:bodyPr wrap="square" lIns="0" tIns="8557" rIns="0" bIns="-8557" rtlCol="0" anchor="t"/>
+          <a:bodyPr wrap="square" lIns="0" tIns="9700" rIns="0" bIns="-9700" rtlCol="0" anchor="t"/>
           <a:lstStyle/>
           <a:p>
             <a:pPr algn="l" indent="0" marL="0">
               <a:lnSpc>
-                <a:spcPts val="3038"/>
+                <a:spcPts val="3443"/>
               </a:lnSpc>
               <a:buNone/>
             </a:pPr>
             <a:r>
-              <a:rPr lang="en-US" sz="2250" dirty="0" spc="4" kern="0">
+              <a:rPr lang="en-US" sz="2550" dirty="0" spc="-3" kern="0">
                 <a:solidFill>
                   <a:srgbClr val="14161C"/>
                 </a:solidFill>
@@ -9935,7 +9924,7 @@
               <a:t>Số</a:t>
             </a:r>
             <a:r>
-              <a:rPr lang="en-US" sz="2250" dirty="0" spc="3" kern="0">
+              <a:rPr lang="en-US" sz="2550" dirty="0" spc="0" kern="0">
                 <a:solidFill>
                   <a:srgbClr val="14161C"/>
                 </a:solidFill>
@@ -9946,7 +9935,7 @@
               <a:t> lớn</a:t>
             </a:r>
             <a:r>
-              <a:rPr lang="en-US" sz="2250" dirty="0" spc="-9" kern="0">
+              <a:rPr lang="en-US" sz="2550" dirty="0" spc="-10" kern="0">
                 <a:solidFill>
                   <a:srgbClr val="14161C"/>
                 </a:solidFill>
@@ -9957,7 +9946,7 @@
               <a:t> nhất</a:t>
             </a:r>
             <a:r>
-              <a:rPr lang="en-US" sz="2250" dirty="0" spc="-1" kern="0">
+              <a:rPr lang="en-US" sz="2550" dirty="0" spc="1" kern="0">
                 <a:solidFill>
                   <a:srgbClr val="14161C"/>
                 </a:solidFill>
@@ -9965,20 +9954,9 @@
                 <a:ea typeface="Be Vietnam Pro" pitchFamily="34" charset="-122"/>
                 <a:cs typeface="Be Vietnam Pro" pitchFamily="34" charset="-120"/>
               </a:rPr>
-              <a:t> nằm</a:t>
-            </a:r>
-            <a:r>
-              <a:rPr lang="en-US" sz="2250" dirty="0" spc="1" kern="0">
-                <a:solidFill>
-                  <a:srgbClr val="14161C"/>
-                </a:solidFill>
-                <a:latin typeface="Be Vietnam Pro" pitchFamily="34" charset="0"/>
-                <a:ea typeface="Be Vietnam Pro" pitchFamily="34" charset="-122"/>
-                <a:cs typeface="Be Vietnam Pro" pitchFamily="34" charset="-120"/>
-              </a:rPr>
-              <a:t> cuối</a:t>
-            </a:r>
-            <a:endParaRPr lang="en-US" sz="2250" dirty="0"/>
+              <a:t> nằm cuối</a:t>
+            </a:r>
+            <a:endParaRPr lang="en-US" sz="2550" dirty="0"/>
           </a:p>
         </p:txBody>
       </p:sp>
@@ -10007,7 +9985,7 @@
               <a:buNone/>
             </a:pPr>
             <a:r>
-              <a:rPr lang="en-US" sz="2250" dirty="0" spc="-2" kern="0">
+              <a:rPr lang="en-US" sz="2550" dirty="0" spc="2" kern="0">
                 <a:solidFill>
                   <a:srgbClr val="6B6A66"/>
                 </a:solidFill>
@@ -10018,7 +9996,7 @@
               <a:t>Ví</a:t>
             </a:r>
             <a:r>
-              <a:rPr lang="en-US" sz="2250" dirty="0" spc="5" kern="0">
+              <a:rPr lang="en-US" sz="2550" dirty="0" spc="-2" kern="0">
                 <a:solidFill>
                   <a:srgbClr val="6B6A66"/>
                 </a:solidFill>
@@ -10029,7 +10007,7 @@
               <a:t> dụ</a:t>
             </a:r>
             <a:r>
-              <a:rPr lang="en-US" sz="2250" dirty="0" spc="-8" kern="0">
+              <a:rPr lang="en-US" sz="2550" dirty="0" spc="-10" kern="0">
                 <a:solidFill>
                   <a:srgbClr val="6B6A66"/>
                 </a:solidFill>
@@ -10040,7 +10018,7 @@
               <a:t> này</a:t>
             </a:r>
             <a:r>
-              <a:rPr lang="en-US" sz="2250" dirty="0" spc="1" kern="0">
+              <a:rPr lang="en-US" sz="2550" dirty="0" spc="1" kern="0">
                 <a:solidFill>
                   <a:srgbClr val="6B6A66"/>
                 </a:solidFill>
@@ -10051,7 +10029,7 @@
               <a:t> chỉ</a:t>
             </a:r>
             <a:r>
-              <a:rPr lang="en-US" sz="2250" dirty="0" spc="-24" kern="0">
+              <a:rPr lang="en-US" sz="2550" dirty="0" spc="-24" kern="0">
                 <a:solidFill>
                   <a:srgbClr val="6B6A66"/>
                 </a:solidFill>
@@ -10062,7 +10040,7 @@
               <a:t> xét</a:t>
             </a:r>
             <a:r>
-              <a:rPr lang="en-US" sz="2250" dirty="0" spc="-10" kern="0">
+              <a:rPr lang="en-US" sz="2550" dirty="0" spc="-10" kern="0">
                 <a:solidFill>
                   <a:srgbClr val="6B6A66"/>
                 </a:solidFill>
@@ -10073,7 +10051,7 @@
               <a:t> container</a:t>
             </a:r>
             <a:r>
-              <a:rPr lang="en-US" sz="2250" dirty="0" spc="11" kern="0">
+              <a:rPr lang="en-US" sz="2550" dirty="0" spc="14" kern="0">
                 <a:solidFill>
                   <a:srgbClr val="6B6A66"/>
                 </a:solidFill>
@@ -10084,7 +10062,7 @@
               <a:t> đầu</a:t>
             </a:r>
             <a:r>
-              <a:rPr lang="en-US" sz="2250" dirty="0" spc="-1" kern="0">
+              <a:rPr lang="en-US" sz="2550" dirty="0" spc="1" kern="0">
                 <a:solidFill>
                   <a:srgbClr val="6B6A66"/>
                 </a:solidFill>
@@ -10095,7 +10073,7 @@
               <a:t> tiên</a:t>
             </a:r>
             <a:r>
-              <a:rPr lang="en-US" sz="2250" dirty="0" spc="3" kern="0">
+              <a:rPr lang="en-US" sz="2550" dirty="0" spc="-2" kern="0">
                 <a:solidFill>
                   <a:srgbClr val="6B6A66"/>
                 </a:solidFill>
@@ -10106,7 +10084,7 @@
               <a:t> của</a:t>
             </a:r>
             <a:r>
-              <a:rPr lang="en-US" sz="2250" dirty="0" spc="0" kern="0">
+              <a:rPr lang="en-US" sz="2550" dirty="0" spc="0" kern="0">
                 <a:solidFill>
                   <a:srgbClr val="6B6A66"/>
                 </a:solidFill>
@@ -10117,7 +10095,7 @@
               <a:t> mỗi</a:t>
             </a:r>
             <a:r>
-              <a:rPr lang="en-US" sz="2250" dirty="0" spc="-10" kern="0">
+              <a:rPr lang="en-US" sz="2550" dirty="0" spc="-11" kern="0">
                 <a:solidFill>
                   <a:srgbClr val="6B6A66"/>
                 </a:solidFill>
@@ -10127,7 +10105,7 @@
               </a:rPr>
               <a:t> Pod.</a:t>
             </a:r>
-            <a:endParaRPr lang="en-US" sz="2250" dirty="0"/>
+            <a:endParaRPr lang="en-US" sz="2550" dirty="0"/>
           </a:p>
         </p:txBody>
       </p:sp>
@@ -12152,7 +12130,7 @@
               <a:buNone/>
             </a:pPr>
             <a:r>
-              <a:rPr lang="en-US" sz="2400" b="1" dirty="0" spc="-7" kern="0">
+              <a:rPr lang="en-US" sz="2550" b="1" dirty="0" spc="-8" kern="0">
                 <a:solidFill>
                   <a:srgbClr val="14161C"/>
                 </a:solidFill>
@@ -12162,7 +12140,7 @@
               </a:rPr>
               <a:t>status.phase</a:t>
             </a:r>
-            <a:endParaRPr lang="en-US" sz="2400" dirty="0"/>
+            <a:endParaRPr lang="en-US" sz="2550" dirty="0"/>
           </a:p>
         </p:txBody>
       </p:sp>
@@ -12184,19 +12162,19 @@
           <a:ln/>
         </p:spPr>
         <p:txBody>
-          <a:bodyPr wrap="square" lIns="0" tIns="8557" rIns="0" bIns="-8557" rtlCol="0" anchor="t"/>
+          <a:bodyPr wrap="square" lIns="0" tIns="9700" rIns="0" bIns="-9700" rtlCol="0" anchor="t"/>
           <a:lstStyle/>
           <a:p>
-            <a:pPr algn="l" marL="285750" indent="-204151">
+            <a:pPr algn="l" marL="323850" indent="-231371">
               <a:lnSpc>
-                <a:spcPts val="3038"/>
+                <a:spcPts val="3443"/>
               </a:lnSpc>
               <a:buSzPct val="100000"/>
               <a:buFont typeface="Arial"/>
               <a:buChar char="•"/>
             </a:pPr>
             <a:r>
-              <a:rPr lang="en-US" sz="2250" dirty="0" spc="-7" kern="0">
+              <a:rPr lang="en-US" sz="2550" dirty="0" spc="-6" kern="0">
                 <a:solidFill>
                   <a:srgbClr val="14161C"/>
                 </a:solidFill>
@@ -12207,7 +12185,7 @@
               <a:t>Pending,</a:t>
             </a:r>
             <a:r>
-              <a:rPr lang="en-US" sz="2250" dirty="0" spc="-14" kern="0">
+              <a:rPr lang="en-US" sz="2550" dirty="0" spc="-15" kern="0">
                 <a:solidFill>
                   <a:srgbClr val="14161C"/>
                 </a:solidFill>
@@ -12217,19 +12195,19 @@
               </a:rPr>
               <a:t> Running</a:t>
             </a:r>
-            <a:endParaRPr lang="en-US" sz="2250" dirty="0"/>
+            <a:endParaRPr lang="en-US" sz="2550" dirty="0"/>
           </a:p>
           <a:p>
-            <a:pPr algn="l" marL="285750" indent="-204151">
+            <a:pPr algn="l" marL="323850" indent="-231371">
               <a:lnSpc>
-                <a:spcPts val="3038"/>
+                <a:spcPts val="3443"/>
               </a:lnSpc>
               <a:buSzPct val="100000"/>
               <a:buFont typeface="Arial"/>
               <a:buChar char="•"/>
             </a:pPr>
             <a:r>
-              <a:rPr lang="en-US" sz="2250" dirty="0" spc="-3" kern="0">
+              <a:rPr lang="en-US" sz="2550" dirty="0" spc="-3" kern="0">
                 <a:solidFill>
                   <a:srgbClr val="14161C"/>
                 </a:solidFill>
@@ -12240,7 +12218,7 @@
               <a:t>Succeeded,</a:t>
             </a:r>
             <a:r>
-              <a:rPr lang="en-US" sz="2250" dirty="0" spc="-18" kern="0">
+              <a:rPr lang="en-US" sz="2550" dirty="0" spc="-20" kern="0">
                 <a:solidFill>
                   <a:srgbClr val="14161C"/>
                 </a:solidFill>
@@ -12250,19 +12228,19 @@
               </a:rPr>
               <a:t> Failed</a:t>
             </a:r>
-            <a:endParaRPr lang="en-US" sz="2250" dirty="0"/>
+            <a:endParaRPr lang="en-US" sz="2550" dirty="0"/>
           </a:p>
           <a:p>
-            <a:pPr algn="l" marL="285750" indent="-204151">
+            <a:pPr algn="l" marL="323850" indent="-231371">
               <a:lnSpc>
-                <a:spcPts val="3038"/>
+                <a:spcPts val="3443"/>
               </a:lnSpc>
               <a:buSzPct val="100000"/>
               <a:buFont typeface="Arial"/>
               <a:buChar char="•"/>
             </a:pPr>
             <a:r>
-              <a:rPr lang="en-US" sz="2250" dirty="0" spc="-8" kern="0">
+              <a:rPr lang="en-US" sz="2550" dirty="0" spc="-7" kern="0">
                 <a:solidFill>
                   <a:srgbClr val="14161C"/>
                 </a:solidFill>
@@ -12272,7 +12250,7 @@
               </a:rPr>
               <a:t>Unknown</a:t>
             </a:r>
-            <a:endParaRPr lang="en-US" sz="2250" dirty="0"/>
+            <a:endParaRPr lang="en-US" sz="2550" dirty="0"/>
           </a:p>
         </p:txBody>
       </p:sp>
@@ -12377,17 +12355,17 @@
           <a:ln/>
         </p:spPr>
         <p:txBody>
-          <a:bodyPr wrap="square" lIns="0" tIns="8557" rIns="0" bIns="-8557" rtlCol="0" anchor="t"/>
+          <a:bodyPr wrap="square" lIns="0" tIns="9700" rIns="0" bIns="-9700" rtlCol="0" anchor="t"/>
           <a:lstStyle/>
           <a:p>
             <a:pPr algn="l" indent="0" marL="0">
               <a:lnSpc>
-                <a:spcPts val="3038"/>
+                <a:spcPts val="3443"/>
               </a:lnSpc>
               <a:buNone/>
             </a:pPr>
             <a:r>
-              <a:rPr lang="en-US" sz="2250" dirty="0" spc="-13" kern="0">
+              <a:rPr lang="en-US" sz="2550" dirty="0" spc="-11" kern="0">
                 <a:solidFill>
                   <a:srgbClr val="E4E1D8"/>
                 </a:solidFill>
@@ -12398,7 +12376,7 @@
               <a:t>Container</a:t>
             </a:r>
             <a:r>
-              <a:rPr lang="en-US" sz="2250" dirty="0" spc="-4" kern="0">
+              <a:rPr lang="en-US" sz="2550" dirty="0" spc="-4" kern="0">
                 <a:solidFill>
                   <a:srgbClr val="E4E1D8"/>
                 </a:solidFill>
@@ -12409,7 +12387,7 @@
               <a:t> chết,</a:t>
             </a:r>
             <a:r>
-              <a:rPr lang="en-US" sz="2250" dirty="0" spc="0" kern="0">
+              <a:rPr lang="en-US" sz="2550" dirty="0" spc="0" kern="0">
                 <a:solidFill>
                   <a:srgbClr val="E4E1D8"/>
                 </a:solidFill>
@@ -12420,7 +12398,7 @@
               <a:t> khởi</a:t>
             </a:r>
             <a:r>
-              <a:rPr lang="en-US" sz="2250" dirty="0" spc="11" kern="0">
+              <a:rPr lang="en-US" sz="2550" dirty="0" spc="10" kern="0">
                 <a:solidFill>
                   <a:srgbClr val="E4E1D8"/>
                 </a:solidFill>
@@ -12431,7 +12409,7 @@
               <a:t> động</a:t>
             </a:r>
             <a:r>
-              <a:rPr lang="en-US" sz="2250" dirty="0" spc="-2" kern="0">
+              <a:rPr lang="en-US" sz="2550" dirty="0" spc="0" kern="0">
                 <a:solidFill>
                   <a:srgbClr val="E4E1D8"/>
                 </a:solidFill>
@@ -12441,7 +12419,7 @@
               </a:rPr>
               <a:t> lại</a:t>
             </a:r>
-            <a:endParaRPr lang="en-US" sz="2250" dirty="0"/>
+            <a:endParaRPr lang="en-US" sz="2550" dirty="0"/>
           </a:p>
         </p:txBody>
       </p:sp>
@@ -12497,7 +12475,7 @@
               <a:buNone/>
             </a:pPr>
             <a:r>
-              <a:rPr lang="en-US" sz="2400" b="1" dirty="0" spc="-7" kern="0">
+              <a:rPr lang="en-US" sz="2550" b="1" dirty="0" spc="-6" kern="0">
                 <a:solidFill>
                   <a:srgbClr val="E8472B"/>
                 </a:solidFill>
@@ -12508,7 +12486,7 @@
               <a:t>Cột</a:t>
             </a:r>
             <a:r>
-              <a:rPr lang="en-US" sz="2400" b="1" dirty="0" spc="-78" kern="0">
+              <a:rPr lang="en-US" sz="2550" b="1" dirty="0" spc="-82" kern="0">
                 <a:solidFill>
                   <a:srgbClr val="E8472B"/>
                 </a:solidFill>
@@ -12518,7 +12496,7 @@
               </a:rPr>
               <a:t> STATUS</a:t>
             </a:r>
-            <a:endParaRPr lang="en-US" sz="2400" dirty="0"/>
+            <a:endParaRPr lang="en-US" sz="2550" dirty="0"/>
           </a:p>
         </p:txBody>
       </p:sp>
@@ -12540,19 +12518,19 @@
           <a:ln/>
         </p:spPr>
         <p:txBody>
-          <a:bodyPr wrap="square" lIns="0" tIns="8557" rIns="0" bIns="-8557" rtlCol="0" anchor="t"/>
+          <a:bodyPr wrap="square" lIns="0" tIns="9700" rIns="0" bIns="-9700" rtlCol="0" anchor="t"/>
           <a:lstStyle/>
           <a:p>
-            <a:pPr algn="l" marL="285750" indent="-204151">
+            <a:pPr algn="l" marL="323850" indent="-231371">
               <a:lnSpc>
-                <a:spcPts val="3038"/>
+                <a:spcPts val="3443"/>
               </a:lnSpc>
               <a:buSzPct val="100000"/>
               <a:buFont typeface="Arial"/>
               <a:buChar char="•"/>
             </a:pPr>
             <a:r>
-              <a:rPr lang="en-US" sz="2250" dirty="0" spc="-3" kern="0">
+              <a:rPr lang="en-US" sz="2550" dirty="0" spc="-3" kern="0">
                 <a:solidFill>
                   <a:srgbClr val="14161C"/>
                 </a:solidFill>
@@ -12563,7 +12541,7 @@
               <a:t>Do</a:t>
             </a:r>
             <a:r>
-              <a:rPr lang="en-US" sz="2250" dirty="0" spc="-2" kern="0">
+              <a:rPr lang="en-US" sz="2550" dirty="0" spc="-1" kern="0">
                 <a:solidFill>
                   <a:srgbClr val="14161C"/>
                 </a:solidFill>
@@ -12574,7 +12552,7 @@
               <a:t> kubectl</a:t>
             </a:r>
             <a:r>
-              <a:rPr lang="en-US" sz="2250" dirty="0" spc="1" kern="0">
+              <a:rPr lang="en-US" sz="2550" dirty="0" spc="0" kern="0">
                 <a:solidFill>
                   <a:srgbClr val="14161C"/>
                 </a:solidFill>
@@ -12584,19 +12562,19 @@
               </a:rPr>
               <a:t> tính</a:t>
             </a:r>
-            <a:endParaRPr lang="en-US" sz="2250" dirty="0"/>
+            <a:endParaRPr lang="en-US" sz="2550" dirty="0"/>
           </a:p>
           <a:p>
-            <a:pPr algn="l" marL="285750" indent="-204151">
+            <a:pPr algn="l" marL="323850" indent="-231371">
               <a:lnSpc>
-                <a:spcPts val="3038"/>
+                <a:spcPts val="3443"/>
               </a:lnSpc>
               <a:buSzPct val="100000"/>
               <a:buFont typeface="Arial"/>
               <a:buChar char="•"/>
             </a:pPr>
             <a:r>
-              <a:rPr lang="en-US" sz="2250" dirty="0" spc="-3" kern="0">
+              <a:rPr lang="en-US" sz="2550" dirty="0" spc="-1" kern="0">
                 <a:solidFill>
                   <a:srgbClr val="14161C"/>
                 </a:solidFill>
@@ -12607,7 +12585,7 @@
               <a:t>Hiện</a:t>
             </a:r>
             <a:r>
-              <a:rPr lang="en-US" sz="2250" dirty="0" spc="-14" kern="0">
+              <a:rPr lang="en-US" sz="2550" dirty="0" spc="-16" kern="0">
                 <a:solidFill>
                   <a:srgbClr val="14161C"/>
                 </a:solidFill>
@@ -12617,7 +12595,7 @@
               </a:rPr>
               <a:t> CrashLoopBackOff</a:t>
             </a:r>
-            <a:endParaRPr lang="en-US" sz="2250" dirty="0"/>
+            <a:endParaRPr lang="en-US" sz="2550" dirty="0"/>
           </a:p>
         </p:txBody>
       </p:sp>
@@ -13612,7 +13590,7 @@
               <a:buNone/>
             </a:pPr>
             <a:r>
-              <a:rPr lang="en-US" sz="2400" b="1" dirty="0" spc="6" kern="0">
+              <a:rPr lang="en-US" sz="2550" b="1" dirty="0" spc="7" kern="0">
                 <a:solidFill>
                   <a:srgbClr val="7C93FF"/>
                 </a:solidFill>
@@ -13623,7 +13601,7 @@
               <a:t>Dấu</a:t>
             </a:r>
             <a:r>
-              <a:rPr lang="en-US" sz="2400" b="1" dirty="0" spc="-11" kern="0">
+              <a:rPr lang="en-US" sz="2550" b="1" dirty="0" spc="-12" kern="0">
                 <a:solidFill>
                   <a:srgbClr val="7C93FF"/>
                 </a:solidFill>
@@ -13633,7 +13611,7 @@
               </a:rPr>
               <a:t> phẩy</a:t>
             </a:r>
-            <a:endParaRPr lang="en-US" sz="2400" dirty="0"/>
+            <a:endParaRPr lang="en-US" sz="2550" dirty="0"/>
           </a:p>
         </p:txBody>
       </p:sp>
@@ -13655,17 +13633,17 @@
           <a:ln/>
         </p:spPr>
         <p:txBody>
-          <a:bodyPr wrap="square" lIns="0" tIns="5001" rIns="0" bIns="-5001" rtlCol="0" anchor="t"/>
+          <a:bodyPr wrap="square" lIns="0" tIns="5667" rIns="0" bIns="-5667" rtlCol="0" anchor="t"/>
           <a:lstStyle/>
           <a:p>
             <a:pPr algn="l" indent="0" marL="0">
               <a:lnSpc>
-                <a:spcPts val="3150"/>
+                <a:spcPts val="3570"/>
               </a:lnSpc>
               <a:buNone/>
             </a:pPr>
             <a:r>
-              <a:rPr lang="en-US" sz="2250" dirty="0" spc="-2" kern="0">
+              <a:rPr lang="en-US" sz="2550" dirty="0" spc="1" kern="0">
                 <a:solidFill>
                   <a:srgbClr val="E4E1D8"/>
                 </a:solidFill>
@@ -13673,10 +13651,10 @@
                 <a:ea typeface="Be Vietnam Pro" pitchFamily="34" charset="-122"/>
                 <a:cs typeface="Be Vietnam Pro" pitchFamily="34" charset="-120"/>
               </a:rPr>
-              <a:t>Nối</a:t>
-            </a:r>
-            <a:r>
-              <a:rPr lang="en-US" sz="2250" dirty="0" spc="-1" kern="0">
+              <a:t>Nối nhiều</a:t>
+            </a:r>
+            <a:r>
+              <a:rPr lang="en-US" sz="2550" dirty="0" spc="21" kern="0">
                 <a:solidFill>
                   <a:srgbClr val="E4E1D8"/>
                 </a:solidFill>
@@ -13684,10 +13662,10 @@
                 <a:ea typeface="Be Vietnam Pro" pitchFamily="34" charset="-122"/>
                 <a:cs typeface="Be Vietnam Pro" pitchFamily="34" charset="-120"/>
               </a:rPr>
-              <a:t> nhiều</a:t>
-            </a:r>
-            <a:r>
-              <a:rPr lang="en-US" sz="2250" dirty="0" spc="17" kern="0">
+              <a:t> điều</a:t>
+            </a:r>
+            <a:r>
+              <a:rPr lang="en-US" sz="2550" dirty="0" spc="0" kern="0">
                 <a:solidFill>
                   <a:srgbClr val="E4E1D8"/>
                 </a:solidFill>
@@ -13695,10 +13673,10 @@
                 <a:ea typeface="Be Vietnam Pro" pitchFamily="34" charset="-122"/>
                 <a:cs typeface="Be Vietnam Pro" pitchFamily="34" charset="-120"/>
               </a:rPr>
-              <a:t> điều</a:t>
-            </a:r>
-            <a:r>
-              <a:rPr lang="en-US" sz="2250" dirty="0" spc="-1" kern="0">
+              <a:t> kiện</a:t>
+            </a:r>
+            <a:r>
+              <a:rPr lang="en-US" sz="2550" dirty="0" spc="1" kern="0">
                 <a:solidFill>
                   <a:srgbClr val="E4E1D8"/>
                 </a:solidFill>
@@ -13706,10 +13684,10 @@
                 <a:ea typeface="Be Vietnam Pro" pitchFamily="34" charset="-122"/>
                 <a:cs typeface="Be Vietnam Pro" pitchFamily="34" charset="-120"/>
               </a:rPr>
-              <a:t> kiện</a:t>
-            </a:r>
-            <a:r>
-              <a:rPr lang="en-US" sz="2250" dirty="0" spc="0" kern="0">
+              <a:t> thành</a:t>
+            </a:r>
+            <a:r>
+              <a:rPr lang="en-US" sz="2550" dirty="0" spc="-10" kern="0">
                 <a:solidFill>
                   <a:srgbClr val="E4E1D8"/>
                 </a:solidFill>
@@ -13717,10 +13695,10 @@
                 <a:ea typeface="Be Vietnam Pro" pitchFamily="34" charset="-122"/>
                 <a:cs typeface="Be Vietnam Pro" pitchFamily="34" charset="-120"/>
               </a:rPr>
-              <a:t> thành</a:t>
-            </a:r>
-            <a:r>
-              <a:rPr lang="en-US" sz="2250" dirty="0" spc="-8" kern="0">
+              <a:t> "và",</a:t>
+            </a:r>
+            <a:r>
+              <a:rPr lang="en-US" sz="2550" dirty="0" spc="0" kern="0">
                 <a:solidFill>
                   <a:srgbClr val="E4E1D8"/>
                 </a:solidFill>
@@ -13728,10 +13706,10 @@
                 <a:ea typeface="Be Vietnam Pro" pitchFamily="34" charset="-122"/>
                 <a:cs typeface="Be Vietnam Pro" pitchFamily="34" charset="-120"/>
               </a:rPr>
-              <a:t> "và",</a:t>
-            </a:r>
-            <a:r>
-              <a:rPr lang="en-US" sz="2250" dirty="0" spc="1" kern="0">
+              <a:t> cả nhãn lẫn</a:t>
+            </a:r>
+            <a:r>
+              <a:rPr lang="en-US" sz="2550" dirty="0" spc="5" kern="0">
                 <a:solidFill>
                   <a:srgbClr val="E4E1D8"/>
                 </a:solidFill>
@@ -13739,31 +13717,9 @@
                 <a:ea typeface="Be Vietnam Pro" pitchFamily="34" charset="-122"/>
                 <a:cs typeface="Be Vietnam Pro" pitchFamily="34" charset="-120"/>
               </a:rPr>
-              <a:t> cả</a:t>
-            </a:r>
-            <a:r>
-              <a:rPr lang="en-US" sz="2250" dirty="0" spc="0" kern="0">
-                <a:solidFill>
-                  <a:srgbClr val="E4E1D8"/>
-                </a:solidFill>
-                <a:latin typeface="Be Vietnam Pro" pitchFamily="34" charset="0"/>
-                <a:ea typeface="Be Vietnam Pro" pitchFamily="34" charset="-122"/>
-                <a:cs typeface="Be Vietnam Pro" pitchFamily="34" charset="-120"/>
-              </a:rPr>
-              <a:t> nhãn lẫn</a:t>
-            </a:r>
-            <a:r>
-              <a:rPr lang="en-US" sz="2250" dirty="0" spc="5" kern="0">
-                <a:solidFill>
-                  <a:srgbClr val="E4E1D8"/>
-                </a:solidFill>
-                <a:latin typeface="Be Vietnam Pro" pitchFamily="34" charset="0"/>
-                <a:ea typeface="Be Vietnam Pro" pitchFamily="34" charset="-122"/>
-                <a:cs typeface="Be Vietnam Pro" pitchFamily="34" charset="-120"/>
-              </a:rPr>
               <a:t> trường.</a:t>
             </a:r>
-            <a:endParaRPr lang="en-US" sz="2250" dirty="0"/>
+            <a:endParaRPr lang="en-US" sz="2550" dirty="0"/>
           </a:p>
         </p:txBody>
       </p:sp>
@@ -13819,7 +13775,7 @@
               <a:buNone/>
             </a:pPr>
             <a:r>
-              <a:rPr lang="en-US" sz="2400" b="1" dirty="0" spc="5" kern="0">
+              <a:rPr lang="en-US" sz="2550" b="1" dirty="0" spc="0" kern="0">
                 <a:solidFill>
                   <a:srgbClr val="7C93FF"/>
                 </a:solidFill>
@@ -13830,7 +13786,7 @@
               <a:t>!=</a:t>
             </a:r>
             <a:r>
-              <a:rPr lang="en-US" sz="2400" b="1" dirty="0" spc="-16" kern="0">
+              <a:rPr lang="en-US" sz="2550" b="1" dirty="0" spc="-17" kern="0">
                 <a:solidFill>
                   <a:srgbClr val="7C93FF"/>
                 </a:solidFill>
@@ -13841,7 +13797,7 @@
               <a:t> rộng</a:t>
             </a:r>
             <a:r>
-              <a:rPr lang="en-US" sz="2400" b="1" dirty="0" spc="-3" kern="0">
+              <a:rPr lang="en-US" sz="2550" b="1" dirty="0" spc="-3" kern="0">
                 <a:solidFill>
                   <a:srgbClr val="7C93FF"/>
                 </a:solidFill>
@@ -13852,7 +13808,7 @@
               <a:t> hơn</a:t>
             </a:r>
             <a:r>
-              <a:rPr lang="en-US" sz="2400" b="1" dirty="0" spc="-21" kern="0">
+              <a:rPr lang="en-US" sz="2550" b="1" dirty="0" spc="-21" kern="0">
                 <a:solidFill>
                   <a:srgbClr val="7C93FF"/>
                 </a:solidFill>
@@ -13863,7 +13819,7 @@
               <a:t> vẻ</a:t>
             </a:r>
             <a:r>
-              <a:rPr lang="en-US" sz="2400" b="1" dirty="0" spc="-6" kern="0">
+              <a:rPr lang="en-US" sz="2550" b="1" dirty="0" spc="-4" kern="0">
                 <a:solidFill>
                   <a:srgbClr val="7C93FF"/>
                 </a:solidFill>
@@ -13873,7 +13829,7 @@
               </a:rPr>
               <a:t> ngoài</a:t>
             </a:r>
-            <a:endParaRPr lang="en-US" sz="2400" dirty="0"/>
+            <a:endParaRPr lang="en-US" sz="2550" dirty="0"/>
           </a:p>
         </p:txBody>
       </p:sp>
@@ -13895,17 +13851,17 @@
           <a:ln/>
         </p:spPr>
         <p:txBody>
-          <a:bodyPr wrap="square" lIns="0" tIns="5001" rIns="0" bIns="-5001" rtlCol="0" anchor="t"/>
+          <a:bodyPr wrap="square" lIns="0" tIns="5667" rIns="0" bIns="-5667" rtlCol="0" anchor="t"/>
           <a:lstStyle/>
           <a:p>
             <a:pPr algn="l" indent="0" marL="0">
               <a:lnSpc>
-                <a:spcPts val="3150"/>
+                <a:spcPts val="3570"/>
               </a:lnSpc>
               <a:buNone/>
             </a:pPr>
             <a:r>
-              <a:rPr lang="en-US" sz="2250" dirty="0" spc="-10" kern="0">
+              <a:rPr lang="en-US" sz="2550" dirty="0" spc="-9" kern="0">
                 <a:solidFill>
                   <a:srgbClr val="E4E1D8"/>
                 </a:solidFill>
@@ -13916,7 +13872,7 @@
               <a:t>tier!=batch</a:t>
             </a:r>
             <a:r>
-              <a:rPr lang="en-US" sz="2250" dirty="0" spc="3" kern="0">
+              <a:rPr lang="en-US" sz="2550" dirty="0" spc="-2" kern="0">
                 <a:solidFill>
                   <a:srgbClr val="E4E1D8"/>
                 </a:solidFill>
@@ -13927,7 +13883,7 @@
               <a:t> chọn</a:t>
             </a:r>
             <a:r>
-              <a:rPr lang="en-US" sz="2250" dirty="0" spc="1" kern="0">
+              <a:rPr lang="en-US" sz="2550" dirty="0" spc="1" kern="0">
                 <a:solidFill>
                   <a:srgbClr val="E4E1D8"/>
                 </a:solidFill>
@@ -13938,7 +13894,7 @@
               <a:t> cả</a:t>
             </a:r>
             <a:r>
-              <a:rPr lang="en-US" sz="2250" dirty="0" spc="-13" kern="0">
+              <a:rPr lang="en-US" sz="2550" dirty="0" spc="-15" kern="0">
                 <a:solidFill>
                   <a:srgbClr val="E4E1D8"/>
                 </a:solidFill>
@@ -13949,7 +13905,7 @@
               <a:t> Pod</a:t>
             </a:r>
             <a:r>
-              <a:rPr lang="en-US" sz="2250" dirty="0" spc="1" kern="0">
+              <a:rPr lang="en-US" sz="2550" dirty="0" spc="0" kern="0">
                 <a:solidFill>
                   <a:srgbClr val="E4E1D8"/>
                 </a:solidFill>
@@ -13960,7 +13916,7 @@
               <a:t> không</a:t>
             </a:r>
             <a:r>
-              <a:rPr lang="en-US" sz="2250" dirty="0" spc="4" kern="0">
+              <a:rPr lang="en-US" sz="2550" dirty="0" spc="1" kern="0">
                 <a:solidFill>
                   <a:srgbClr val="E4E1D8"/>
                 </a:solidFill>
@@ -13971,7 +13927,7 @@
               <a:t> có</a:t>
             </a:r>
             <a:r>
-              <a:rPr lang="en-US" sz="2250" dirty="0" spc="0" kern="0">
+              <a:rPr lang="en-US" sz="2550" dirty="0" spc="0" kern="0">
                 <a:solidFill>
                   <a:srgbClr val="E4E1D8"/>
                 </a:solidFill>
@@ -13979,9 +13935,20 @@
                 <a:ea typeface="Be Vietnam Pro" pitchFamily="34" charset="-122"/>
                 <a:cs typeface="Be Vietnam Pro" pitchFamily="34" charset="-120"/>
               </a:rPr>
-              <a:t> nhãn tier.</a:t>
-            </a:r>
-            <a:endParaRPr lang="en-US" sz="2250" dirty="0"/>
+              <a:t> nhãn</a:t>
+            </a:r>
+            <a:r>
+              <a:rPr lang="en-US" sz="2550" dirty="0" spc="1" kern="0">
+                <a:solidFill>
+                  <a:srgbClr val="E4E1D8"/>
+                </a:solidFill>
+                <a:latin typeface="Be Vietnam Pro" pitchFamily="34" charset="0"/>
+                <a:ea typeface="Be Vietnam Pro" pitchFamily="34" charset="-122"/>
+                <a:cs typeface="Be Vietnam Pro" pitchFamily="34" charset="-120"/>
+              </a:rPr>
+              <a:t> tier.</a:t>
+            </a:r>
+            <a:endParaRPr lang="en-US" sz="2550" dirty="0"/>
           </a:p>
         </p:txBody>
       </p:sp>
@@ -14037,7 +14004,7 @@
               <a:buNone/>
             </a:pPr>
             <a:r>
-              <a:rPr lang="en-US" sz="2400" b="1" dirty="0" spc="-91" kern="0">
+              <a:rPr lang="en-US" sz="2550" b="1" dirty="0" spc="-95" kern="0">
                 <a:solidFill>
                   <a:srgbClr val="FFB454"/>
                 </a:solidFill>
@@ -14048,7 +14015,7 @@
               <a:t>STATUS</a:t>
             </a:r>
             <a:r>
-              <a:rPr lang="en-US" sz="2400" b="1" dirty="0" spc="-8" kern="0">
+              <a:rPr lang="en-US" sz="2550" b="1" dirty="0" spc="-6" kern="0">
                 <a:solidFill>
                   <a:srgbClr val="FFB454"/>
                 </a:solidFill>
@@ -14059,7 +14026,7 @@
               <a:t> không</a:t>
             </a:r>
             <a:r>
-              <a:rPr lang="en-US" sz="2400" b="1" dirty="0" spc="-4" kern="0">
+              <a:rPr lang="en-US" sz="2550" b="1" dirty="0" spc="-3" kern="0">
                 <a:solidFill>
                   <a:srgbClr val="FFB454"/>
                 </a:solidFill>
@@ -14070,7 +14037,7 @@
               <a:t> phải</a:t>
             </a:r>
             <a:r>
-              <a:rPr lang="en-US" sz="2400" b="1" dirty="0" spc="-6" kern="0">
+              <a:rPr lang="en-US" sz="2550" b="1" dirty="0" spc="-7" kern="0">
                 <a:solidFill>
                   <a:srgbClr val="FFB454"/>
                 </a:solidFill>
@@ -14080,7 +14047,7 @@
               </a:rPr>
               <a:t> phase</a:t>
             </a:r>
-            <a:endParaRPr lang="en-US" sz="2400" dirty="0"/>
+            <a:endParaRPr lang="en-US" sz="2550" dirty="0"/>
           </a:p>
         </p:txBody>
       </p:sp>
@@ -14102,17 +14069,17 @@
           <a:ln/>
         </p:spPr>
         <p:txBody>
-          <a:bodyPr wrap="square" lIns="0" tIns="5001" rIns="0" bIns="-5001" rtlCol="0" anchor="t"/>
+          <a:bodyPr wrap="square" lIns="0" tIns="5667" rIns="0" bIns="-5667" rtlCol="0" anchor="t"/>
           <a:lstStyle/>
           <a:p>
             <a:pPr algn="l" indent="0" marL="0">
               <a:lnSpc>
-                <a:spcPts val="3150"/>
+                <a:spcPts val="3570"/>
               </a:lnSpc>
               <a:buNone/>
             </a:pPr>
             <a:r>
-              <a:rPr lang="en-US" sz="2250" dirty="0" spc="-10" kern="0">
+              <a:rPr lang="en-US" sz="2550" dirty="0" spc="-11" kern="0">
                 <a:solidFill>
                   <a:srgbClr val="E4E1D8"/>
                 </a:solidFill>
@@ -14123,7 +14090,7 @@
               <a:t>phase!=Running</a:t>
             </a:r>
             <a:r>
-              <a:rPr lang="en-US" sz="2250" dirty="0" spc="4" kern="0">
+              <a:rPr lang="en-US" sz="2550" dirty="0" spc="1" kern="0">
                 <a:solidFill>
                   <a:srgbClr val="E4E1D8"/>
                 </a:solidFill>
@@ -14134,7 +14101,7 @@
               <a:t> chọn</a:t>
             </a:r>
             <a:r>
-              <a:rPr lang="en-US" sz="2250" dirty="0" spc="1" kern="0">
+              <a:rPr lang="en-US" sz="2550" dirty="0" spc="0" kern="0">
                 <a:solidFill>
                   <a:srgbClr val="E4E1D8"/>
                 </a:solidFill>
@@ -14145,7 +14112,7 @@
               <a:t> cả</a:t>
             </a:r>
             <a:r>
-              <a:rPr lang="en-US" sz="2250" dirty="0" spc="-13" kern="0">
+              <a:rPr lang="en-US" sz="2550" dirty="0" spc="-15" kern="0">
                 <a:solidFill>
                   <a:srgbClr val="E4E1D8"/>
                 </a:solidFill>
@@ -14156,7 +14123,7 @@
               <a:t> Pod</a:t>
             </a:r>
             <a:r>
-              <a:rPr lang="en-US" sz="2250" dirty="0" spc="-2" kern="0">
+              <a:rPr lang="en-US" sz="2550" dirty="0" spc="-3" kern="0">
                 <a:solidFill>
                   <a:srgbClr val="E4E1D8"/>
                 </a:solidFill>
@@ -14167,7 +14134,7 @@
               <a:t> Succeeded</a:t>
             </a:r>
             <a:r>
-              <a:rPr lang="en-US" sz="2250" dirty="0" spc="3" kern="0">
+              <a:rPr lang="en-US" sz="2550" dirty="0" spc="-2" kern="0">
                 <a:solidFill>
                   <a:srgbClr val="E4E1D8"/>
                 </a:solidFill>
@@ -14178,7 +14145,7 @@
               <a:t> của</a:t>
             </a:r>
             <a:r>
-              <a:rPr lang="en-US" sz="2250" dirty="0" spc="1" kern="0">
+              <a:rPr lang="en-US" sz="2550" dirty="0" spc="1" kern="0">
                 <a:solidFill>
                   <a:srgbClr val="E4E1D8"/>
                 </a:solidFill>
@@ -14188,7 +14155,7 @@
               </a:rPr>
               <a:t> Job.</a:t>
             </a:r>
-            <a:endParaRPr lang="en-US" sz="2250" dirty="0"/>
+            <a:endParaRPr lang="en-US" sz="2550" dirty="0"/>
           </a:p>
         </p:txBody>
       </p:sp>
@@ -14244,7 +14211,7 @@
               <a:buNone/>
             </a:pPr>
             <a:r>
-              <a:rPr lang="en-US" sz="2400" b="1" dirty="0" spc="4" kern="0">
+              <a:rPr lang="en-US" sz="2550" b="1" dirty="0" spc="9" kern="0">
                 <a:solidFill>
                   <a:srgbClr val="3DD6A0"/>
                 </a:solidFill>
@@ -14255,7 +14222,7 @@
               <a:t>Đường</a:t>
             </a:r>
             <a:r>
-              <a:rPr lang="en-US" sz="2400" b="1" dirty="0" spc="0" kern="0">
+              <a:rPr lang="en-US" sz="2550" b="1" dirty="0" spc="-1" kern="0">
                 <a:solidFill>
                   <a:srgbClr val="3DD6A0"/>
                 </a:solidFill>
@@ -14266,7 +14233,7 @@
               <a:t> dẫn</a:t>
             </a:r>
             <a:r>
-              <a:rPr lang="en-US" sz="2400" b="1" dirty="0" spc="-5" kern="0">
+              <a:rPr lang="en-US" sz="2550" b="1" dirty="0" spc="-5" kern="0">
                 <a:solidFill>
                   <a:srgbClr val="3DD6A0"/>
                 </a:solidFill>
@@ -14276,7 +14243,7 @@
               </a:rPr>
               <a:t> jsonpath</a:t>
             </a:r>
-            <a:endParaRPr lang="en-US" sz="2400" dirty="0"/>
+            <a:endParaRPr lang="en-US" sz="2550" dirty="0"/>
           </a:p>
         </p:txBody>
       </p:sp>
@@ -14298,17 +14265,17 @@
           <a:ln/>
         </p:spPr>
         <p:txBody>
-          <a:bodyPr wrap="square" lIns="0" tIns="5001" rIns="0" bIns="-5001" rtlCol="0" anchor="t"/>
+          <a:bodyPr wrap="square" lIns="0" tIns="5667" rIns="0" bIns="-5667" rtlCol="0" anchor="t"/>
           <a:lstStyle/>
           <a:p>
             <a:pPr algn="l" indent="0" marL="0">
               <a:lnSpc>
-                <a:spcPts val="3150"/>
+                <a:spcPts val="3570"/>
               </a:lnSpc>
               <a:buNone/>
             </a:pPr>
             <a:r>
-              <a:rPr lang="en-US" sz="2250" dirty="0" spc="-1" kern="0">
+              <a:rPr lang="en-US" sz="2550" dirty="0" spc="-2" kern="0">
                 <a:solidFill>
                   <a:srgbClr val="E4E1D8"/>
                 </a:solidFill>
@@ -14319,7 +14286,7 @@
               <a:t>Danh</a:t>
             </a:r>
             <a:r>
-              <a:rPr lang="en-US" sz="2250" dirty="0" spc="-3" kern="0">
+              <a:rPr lang="en-US" sz="2550" dirty="0" spc="-6" kern="0">
                 <a:solidFill>
                   <a:srgbClr val="E4E1D8"/>
                 </a:solidFill>
@@ -14330,7 +14297,7 @@
               <a:t> sách</a:t>
             </a:r>
             <a:r>
-              <a:rPr lang="en-US" sz="2250" dirty="0" spc="-13" kern="0">
+              <a:rPr lang="en-US" sz="2550" dirty="0" spc="-14" kern="0">
                 <a:solidFill>
                   <a:srgbClr val="E4E1D8"/>
                 </a:solidFill>
@@ -14341,7 +14308,7 @@
               <a:t> bắt</a:t>
             </a:r>
             <a:r>
-              <a:rPr lang="en-US" sz="2250" dirty="0" spc="11" kern="0">
+              <a:rPr lang="en-US" sz="2550" dirty="0" spc="14" kern="0">
                 <a:solidFill>
                   <a:srgbClr val="E4E1D8"/>
                 </a:solidFill>
@@ -14352,7 +14319,7 @@
               <a:t> đầu</a:t>
             </a:r>
             <a:r>
-              <a:rPr lang="en-US" sz="2250" dirty="0" spc="-4" kern="0">
+              <a:rPr lang="en-US" sz="2550" dirty="0" spc="-5" kern="0">
                 <a:solidFill>
                   <a:srgbClr val="E4E1D8"/>
                 </a:solidFill>
@@ -14363,7 +14330,7 @@
               <a:t> .items[*];</a:t>
             </a:r>
             <a:r>
-              <a:rPr lang="en-US" sz="2250" dirty="0" spc="-5" kern="0">
+              <a:rPr lang="en-US" sz="2550" dirty="0" spc="-4" kern="0">
                 <a:solidFill>
                   <a:srgbClr val="E4E1D8"/>
                 </a:solidFill>
@@ -14374,7 +14341,7 @@
               <a:t> một</a:t>
             </a:r>
             <a:r>
-              <a:rPr lang="en-US" sz="2250" dirty="0" spc="-9" kern="0">
+              <a:rPr lang="en-US" sz="2550" dirty="0" spc="-11" kern="0">
                 <a:solidFill>
                   <a:srgbClr val="E4E1D8"/>
                 </a:solidFill>
@@ -14385,7 +14352,7 @@
               <a:t> Pod:</a:t>
             </a:r>
             <a:r>
-              <a:rPr lang="en-US" sz="2250" dirty="0" spc="-10" kern="0">
+              <a:rPr lang="en-US" sz="2550" dirty="0" spc="-10" kern="0">
                 <a:solidFill>
                   <a:srgbClr val="E4E1D8"/>
                 </a:solidFill>
@@ -14395,7 +14362,7 @@
               </a:rPr>
               <a:t> .metadata.name.</a:t>
             </a:r>
-            <a:endParaRPr lang="en-US" sz="2250" dirty="0"/>
+            <a:endParaRPr lang="en-US" sz="2550" dirty="0"/>
           </a:p>
         </p:txBody>
       </p:sp>
@@ -14451,7 +14418,7 @@
               <a:buNone/>
             </a:pPr>
             <a:r>
-              <a:rPr lang="en-US" sz="2400" b="1" dirty="0" spc="4" kern="0">
+              <a:rPr lang="en-US" sz="2550" b="1" dirty="0" spc="4" kern="0">
                 <a:solidFill>
                   <a:srgbClr val="FF6A4D"/>
                 </a:solidFill>
@@ -14462,7 +14429,7 @@
               <a:t>Sắp</a:t>
             </a:r>
             <a:r>
-              <a:rPr lang="en-US" sz="2400" b="1" dirty="0" spc="1" kern="0">
+              <a:rPr lang="en-US" sz="2550" b="1" dirty="0" spc="0" kern="0">
                 <a:solidFill>
                   <a:srgbClr val="FF6A4D"/>
                 </a:solidFill>
@@ -14473,7 +14440,7 @@
               <a:t> thứ</a:t>
             </a:r>
             <a:r>
-              <a:rPr lang="en-US" sz="2400" b="1" dirty="0" spc="3" kern="0">
+              <a:rPr lang="en-US" sz="2550" b="1" dirty="0" spc="-1" kern="0">
                 <a:solidFill>
                   <a:srgbClr val="FF6A4D"/>
                 </a:solidFill>
@@ -14483,7 +14450,7 @@
               </a:rPr>
               <a:t> tự</a:t>
             </a:r>
-            <a:endParaRPr lang="en-US" sz="2400" dirty="0"/>
+            <a:endParaRPr lang="en-US" sz="2550" dirty="0"/>
           </a:p>
         </p:txBody>
       </p:sp>
@@ -14505,17 +14472,17 @@
           <a:ln/>
         </p:spPr>
         <p:txBody>
-          <a:bodyPr wrap="square" lIns="0" tIns="5001" rIns="0" bIns="-5001" rtlCol="0" anchor="t"/>
+          <a:bodyPr wrap="square" lIns="0" tIns="5667" rIns="0" bIns="-5667" rtlCol="0" anchor="t"/>
           <a:lstStyle/>
           <a:p>
             <a:pPr algn="l" indent="0" marL="0">
               <a:lnSpc>
-                <a:spcPts val="3150"/>
+                <a:spcPts val="3570"/>
               </a:lnSpc>
               <a:buNone/>
             </a:pPr>
             <a:r>
-              <a:rPr lang="en-US" sz="2250" dirty="0" spc="-52" kern="0">
+              <a:rPr lang="en-US" sz="2550" dirty="0" spc="-58" kern="0">
                 <a:solidFill>
                   <a:srgbClr val="E4E1D8"/>
                 </a:solidFill>
@@ -14526,7 +14493,7 @@
               <a:t>Tăng</a:t>
             </a:r>
             <a:r>
-              <a:rPr lang="en-US" sz="2250" dirty="0" spc="0" kern="0">
+              <a:rPr lang="en-US" sz="2550" dirty="0" spc="0" kern="0">
                 <a:solidFill>
                   <a:srgbClr val="E4E1D8"/>
                 </a:solidFill>
@@ -14537,7 +14504,7 @@
               <a:t> dần;</a:t>
             </a:r>
             <a:r>
-              <a:rPr lang="en-US" sz="2250" dirty="0" spc="-2" kern="0">
+              <a:rPr lang="en-US" sz="2550" dirty="0" spc="-1" kern="0">
                 <a:solidFill>
                   <a:srgbClr val="E4E1D8"/>
                 </a:solidFill>
@@ -14548,7 +14515,7 @@
               <a:t> ví</a:t>
             </a:r>
             <a:r>
-              <a:rPr lang="en-US" sz="2250" dirty="0" spc="5" kern="0">
+              <a:rPr lang="en-US" sz="2550" dirty="0" spc="-3" kern="0">
                 <a:solidFill>
                   <a:srgbClr val="E4E1D8"/>
                 </a:solidFill>
@@ -14559,7 +14526,7 @@
               <a:t> dụ</a:t>
             </a:r>
             <a:r>
-              <a:rPr lang="en-US" sz="2250" dirty="0" spc="1" kern="0">
+              <a:rPr lang="en-US" sz="2550" dirty="0" spc="1" kern="0">
                 <a:solidFill>
                   <a:srgbClr val="E4E1D8"/>
                 </a:solidFill>
@@ -14570,7 +14537,7 @@
               <a:t> chỉ</a:t>
             </a:r>
             <a:r>
-              <a:rPr lang="en-US" sz="2250" dirty="0" spc="-23" kern="0">
+              <a:rPr lang="en-US" sz="2550" dirty="0" spc="-24" kern="0">
                 <a:solidFill>
                   <a:srgbClr val="E4E1D8"/>
                 </a:solidFill>
@@ -14581,7 +14548,7 @@
               <a:t> xét</a:t>
             </a:r>
             <a:r>
-              <a:rPr lang="en-US" sz="2250" dirty="0" spc="-10" kern="0">
+              <a:rPr lang="en-US" sz="2550" dirty="0" spc="-10" kern="0">
                 <a:solidFill>
                   <a:srgbClr val="E4E1D8"/>
                 </a:solidFill>
@@ -14592,7 +14559,7 @@
               <a:t> container</a:t>
             </a:r>
             <a:r>
-              <a:rPr lang="en-US" sz="2250" dirty="0" spc="10" kern="0">
+              <a:rPr lang="en-US" sz="2550" dirty="0" spc="14" kern="0">
                 <a:solidFill>
                   <a:srgbClr val="E4E1D8"/>
                 </a:solidFill>
@@ -14603,7 +14570,7 @@
               <a:t> đầu</a:t>
             </a:r>
             <a:r>
-              <a:rPr lang="en-US" sz="2250" dirty="0" spc="1" kern="0">
+              <a:rPr lang="en-US" sz="2550" dirty="0" spc="1" kern="0">
                 <a:solidFill>
                   <a:srgbClr val="E4E1D8"/>
                 </a:solidFill>
@@ -14613,7 +14580,7 @@
               </a:rPr>
               <a:t> tiên.</a:t>
             </a:r>
-            <a:endParaRPr lang="en-US" sz="2250" dirty="0"/>
+            <a:endParaRPr lang="en-US" sz="2550" dirty="0"/>
           </a:p>
         </p:txBody>
       </p:sp>

--- a/system-design-101/vi/lessons/sd-13-016/slides/sd-13-016.pptx
+++ b/system-design-101/vi/lessons/sd-13-016/slides/sd-13-016.pptx
@@ -10007,17 +10007,6 @@
               <a:t> dụ</a:t>
             </a:r>
             <a:r>
-              <a:rPr lang="en-US" sz="2550" dirty="0" spc="-10" kern="0">
-                <a:solidFill>
-                  <a:srgbClr val="6B6A66"/>
-                </a:solidFill>
-                <a:latin typeface="Be Vietnam Pro" pitchFamily="34" charset="0"/>
-                <a:ea typeface="Be Vietnam Pro" pitchFamily="34" charset="-122"/>
-                <a:cs typeface="Be Vietnam Pro" pitchFamily="34" charset="-120"/>
-              </a:rPr>
-              <a:t> này</a:t>
-            </a:r>
-            <a:r>
               <a:rPr lang="en-US" sz="2550" dirty="0" spc="1" kern="0">
                 <a:solidFill>
                   <a:srgbClr val="6B6A66"/>

--- a/system-design-101/vi/lessons/sd-13-016/slides/sd-13-016.pptx
+++ b/system-design-101/vi/lessons/sd-13-016/slides/sd-13-016.pptx
@@ -2213,7 +2213,7 @@
               <a:buNone/>
             </a:pPr>
             <a:r>
-              <a:rPr lang="en-US" sz="2400" b="1" dirty="0" spc="-45" kern="0">
+              <a:rPr lang="en-US" sz="2550" b="1" dirty="0" spc="-46" kern="0">
                 <a:solidFill>
                   <a:srgbClr val="9AA0B5"/>
                 </a:solidFill>
@@ -2224,7 +2224,7 @@
               <a:t>Vài</a:t>
             </a:r>
             <a:r>
-              <a:rPr lang="en-US" sz="2400" b="1" dirty="0" spc="-7" kern="0">
+              <a:rPr lang="en-US" sz="2550" b="1" dirty="0" spc="-10" kern="0">
                 <a:solidFill>
                   <a:srgbClr val="9AA0B5"/>
                 </a:solidFill>
@@ -2235,7 +2235,7 @@
               <a:t> trăm</a:t>
             </a:r>
             <a:r>
-              <a:rPr lang="en-US" sz="2400" b="1" dirty="0" spc="-15" kern="0">
+              <a:rPr lang="en-US" sz="2550" b="1" dirty="0" spc="-20" kern="0">
                 <a:solidFill>
                   <a:srgbClr val="9AA0B5"/>
                 </a:solidFill>
@@ -2245,7 +2245,7 @@
               </a:rPr>
               <a:t> Pod</a:t>
             </a:r>
-            <a:endParaRPr lang="en-US" sz="2400" dirty="0"/>
+            <a:endParaRPr lang="en-US" sz="2550" dirty="0"/>
           </a:p>
         </p:txBody>
       </p:sp>
@@ -2283,7 +2283,7 @@
               <a:buNone/>
             </a:pPr>
             <a:r>
-              <a:rPr lang="en-US" sz="2400" b="1" dirty="0" spc="-3" kern="0">
+              <a:rPr lang="en-US" sz="2550" b="1" dirty="0" spc="-1" kern="0">
                 <a:solidFill>
                   <a:srgbClr val="7C93FF"/>
                 </a:solidFill>
@@ -2294,7 +2294,7 @@
               <a:t>1</a:t>
             </a:r>
             <a:r>
-              <a:rPr lang="en-US" sz="2400" b="1" dirty="0" spc="-2" kern="0">
+              <a:rPr lang="en-US" sz="2550" b="1" dirty="0" spc="1" kern="0">
                 <a:solidFill>
                   <a:srgbClr val="7C93FF"/>
                 </a:solidFill>
@@ -2305,7 +2305,7 @@
               <a:t> ·</a:t>
             </a:r>
             <a:r>
-              <a:rPr lang="en-US" sz="2400" b="1" dirty="0" spc="0" kern="0">
+              <a:rPr lang="en-US" sz="2550" b="1" dirty="0" spc="-3" kern="0">
                 <a:solidFill>
                   <a:srgbClr val="7C93FF"/>
                 </a:solidFill>
@@ -2313,9 +2313,20 @@
                 <a:ea typeface="Be Vietnam Pro" pitchFamily="34" charset="-122"/>
                 <a:cs typeface="Be Vietnam Pro" pitchFamily="34" charset="-120"/>
               </a:rPr>
-              <a:t> Phạm vi</a:t>
-            </a:r>
-            <a:endParaRPr lang="en-US" sz="2400" dirty="0"/>
+              <a:t> Phạm</a:t>
+            </a:r>
+            <a:r>
+              <a:rPr lang="en-US" sz="2550" b="1" dirty="0" spc="2" kern="0">
+                <a:solidFill>
+                  <a:srgbClr val="7C93FF"/>
+                </a:solidFill>
+                <a:latin typeface="Be Vietnam Pro" pitchFamily="34" charset="0"/>
+                <a:ea typeface="Be Vietnam Pro" pitchFamily="34" charset="-122"/>
+                <a:cs typeface="Be Vietnam Pro" pitchFamily="34" charset="-120"/>
+              </a:rPr>
+              <a:t> vi</a:t>
+            </a:r>
+            <a:endParaRPr lang="en-US" sz="2550" dirty="0"/>
           </a:p>
         </p:txBody>
       </p:sp>
@@ -2353,7 +2364,7 @@
               <a:buNone/>
             </a:pPr>
             <a:r>
-              <a:rPr lang="en-US" sz="2400" b="1" dirty="0" spc="6" kern="0">
+              <a:rPr lang="en-US" sz="2550" b="1" dirty="0" spc="6" kern="0">
                 <a:solidFill>
                   <a:srgbClr val="7C93FF"/>
                 </a:solidFill>
@@ -2364,7 +2375,7 @@
               <a:t>2</a:t>
             </a:r>
             <a:r>
-              <a:rPr lang="en-US" sz="2400" b="1" dirty="0" spc="-2" kern="0">
+              <a:rPr lang="en-US" sz="2550" b="1" dirty="0" spc="1" kern="0">
                 <a:solidFill>
                   <a:srgbClr val="7C93FF"/>
                 </a:solidFill>
@@ -2372,9 +2383,20 @@
                 <a:ea typeface="Be Vietnam Pro" pitchFamily="34" charset="-122"/>
                 <a:cs typeface="Be Vietnam Pro" pitchFamily="34" charset="-120"/>
               </a:rPr>
-              <a:t> · Nhãn</a:t>
-            </a:r>
-            <a:endParaRPr lang="en-US" sz="2400" dirty="0"/>
+              <a:t> ·</a:t>
+            </a:r>
+            <a:r>
+              <a:rPr lang="en-US" sz="2550" b="1" dirty="0" spc="-2" kern="0">
+                <a:solidFill>
+                  <a:srgbClr val="7C93FF"/>
+                </a:solidFill>
+                <a:latin typeface="Be Vietnam Pro" pitchFamily="34" charset="0"/>
+                <a:ea typeface="Be Vietnam Pro" pitchFamily="34" charset="-122"/>
+                <a:cs typeface="Be Vietnam Pro" pitchFamily="34" charset="-120"/>
+              </a:rPr>
+              <a:t> Nhãn</a:t>
+            </a:r>
+            <a:endParaRPr lang="en-US" sz="2550" dirty="0"/>
           </a:p>
         </p:txBody>
       </p:sp>
@@ -2412,7 +2434,7 @@
               <a:buNone/>
             </a:pPr>
             <a:r>
-              <a:rPr lang="en-US" sz="2400" b="1" dirty="0" spc="-5" kern="0">
+              <a:rPr lang="en-US" sz="2550" b="1" dirty="0" spc="-4" kern="0">
                 <a:solidFill>
                   <a:srgbClr val="FFB454"/>
                 </a:solidFill>
@@ -2423,7 +2445,7 @@
               <a:t>3</a:t>
             </a:r>
             <a:r>
-              <a:rPr lang="en-US" sz="2400" b="1" dirty="0" spc="-2" kern="0">
+              <a:rPr lang="en-US" sz="2550" b="1" dirty="0" spc="1" kern="0">
                 <a:solidFill>
                   <a:srgbClr val="FFB454"/>
                 </a:solidFill>
@@ -2434,7 +2456,7 @@
               <a:t> ·</a:t>
             </a:r>
             <a:r>
-              <a:rPr lang="en-US" sz="2400" b="1" dirty="0" spc="-13" kern="0">
+              <a:rPr lang="en-US" sz="2550" b="1" dirty="0" spc="-14" kern="0">
                 <a:solidFill>
                   <a:srgbClr val="FFB454"/>
                 </a:solidFill>
@@ -2444,7 +2466,7 @@
               </a:rPr>
               <a:t> Trường</a:t>
             </a:r>
-            <a:endParaRPr lang="en-US" sz="2400" dirty="0"/>
+            <a:endParaRPr lang="en-US" sz="2550" dirty="0"/>
           </a:p>
         </p:txBody>
       </p:sp>
@@ -2482,7 +2504,7 @@
               <a:buNone/>
             </a:pPr>
             <a:r>
-              <a:rPr lang="en-US" sz="2400" b="1" dirty="0" spc="-45" kern="0">
+              <a:rPr lang="en-US" sz="2550" b="1" dirty="0" spc="-46" kern="0">
                 <a:solidFill>
                   <a:srgbClr val="F3EEE3"/>
                 </a:solidFill>
@@ -2493,7 +2515,7 @@
               <a:t>Vài</a:t>
             </a:r>
             <a:r>
-              <a:rPr lang="en-US" sz="2400" b="1" dirty="0" spc="-15" kern="0">
+              <a:rPr lang="en-US" sz="2550" b="1" dirty="0" spc="-20" kern="0">
                 <a:solidFill>
                   <a:srgbClr val="F3EEE3"/>
                 </a:solidFill>
@@ -2504,7 +2526,7 @@
               <a:t> Pod</a:t>
             </a:r>
             <a:r>
-              <a:rPr lang="en-US" sz="2400" b="1" dirty="0" spc="3" kern="0">
+              <a:rPr lang="en-US" sz="2550" b="1" dirty="0" spc="3" kern="0">
                 <a:solidFill>
                   <a:srgbClr val="F3EEE3"/>
                 </a:solidFill>
@@ -2515,7 +2537,7 @@
               <a:t> đáng</a:t>
             </a:r>
             <a:r>
-              <a:rPr lang="en-US" sz="2400" b="1" dirty="0" spc="-9" kern="0">
+              <a:rPr lang="en-US" sz="2550" b="1" dirty="0" spc="-7" kern="0">
                 <a:solidFill>
                   <a:srgbClr val="F3EEE3"/>
                 </a:solidFill>
@@ -2525,7 +2547,7 @@
               </a:rPr>
               <a:t> ngờ</a:t>
             </a:r>
-            <a:endParaRPr lang="en-US" sz="2400" dirty="0"/>
+            <a:endParaRPr lang="en-US" sz="2550" dirty="0"/>
           </a:p>
         </p:txBody>
       </p:sp>

--- a/system-design-101/vi/lessons/sd-13-016/slides/sd-13-016.pptx
+++ b/system-design-101/vi/lessons/sd-13-016/slides/sd-13-016.pptx
@@ -5408,12 +5408,12 @@
                     <a:p>
                       <a:pPr algn="l" indent="0" marL="0">
                         <a:lnSpc>
-                          <a:spcPts val="2880"/>
+                          <a:spcPts val="3060"/>
                         </a:lnSpc>
                         <a:buNone/>
                       </a:pPr>
                       <a:r>
-                        <a:rPr lang="en-US" sz="2400" b="1" dirty="0" spc="3" kern="0">
+                        <a:rPr lang="en-US" sz="2550" b="1" dirty="0" spc="2" kern="0">
                           <a:solidFill>
                             <a:srgbClr val="14161C"/>
                           </a:solidFill>
@@ -5424,7 +5424,7 @@
                         <a:t>Bạn</a:t>
                       </a:r>
                       <a:r>
-                        <a:rPr lang="en-US" sz="2400" b="1" dirty="0" spc="-6" kern="0">
+                        <a:rPr lang="en-US" sz="2550" b="1" dirty="0" spc="-4" kern="0">
                           <a:solidFill>
                             <a:srgbClr val="14161C"/>
                           </a:solidFill>
@@ -5437,7 +5437,7 @@
                       <a:endParaRPr lang="en-US" sz="1200" dirty="0"/>
                     </a:p>
                   </a:txBody>
-                  <a:tcPr marL="304800" marR="304800" marT="304800" marB="304800" anchor="ctr">
+                  <a:tcPr marL="304800" marR="304800" marT="300990" marB="300990" anchor="ctr">
                     <a:lnL w="0" cap="flat" cmpd="sng" algn="ctr">
                       <a:noFill/>
                     </a:lnL>
@@ -5462,12 +5462,12 @@
                     <a:p>
                       <a:pPr algn="l" indent="0" marL="0">
                         <a:lnSpc>
-                          <a:spcPts val="2880"/>
+                          <a:spcPts val="3060"/>
                         </a:lnSpc>
                         <a:buNone/>
                       </a:pPr>
                       <a:r>
-                        <a:rPr lang="en-US" sz="2400" b="1" dirty="0" spc="-3" kern="0">
+                        <a:rPr lang="en-US" sz="2550" b="1" dirty="0" spc="-2" kern="0">
                           <a:solidFill>
                             <a:srgbClr val="14161C"/>
                           </a:solidFill>
@@ -5478,7 +5478,7 @@
                         <a:t>kubectl</a:t>
                       </a:r>
                       <a:r>
-                        <a:rPr lang="en-US" sz="2400" b="1" dirty="0" spc="-7" kern="0">
+                        <a:rPr lang="en-US" sz="2550" b="1" dirty="0" spc="-5" kern="0">
                           <a:solidFill>
                             <a:srgbClr val="14161C"/>
                           </a:solidFill>
@@ -5491,7 +5491,7 @@
                       <a:endParaRPr lang="en-US" sz="1200" dirty="0"/>
                     </a:p>
                   </a:txBody>
-                  <a:tcPr marL="304800" marR="304800" marT="304800" marB="304800" anchor="ctr">
+                  <a:tcPr marL="304800" marR="304800" marT="300990" marB="300990" anchor="ctr">
                     <a:lnL w="19050" cap="flat" cmpd="sng" algn="ctr">
                       <a:solidFill>
                         <a:srgbClr val="DDD5C1"/>
@@ -5524,12 +5524,12 @@
                     <a:p>
                       <a:pPr algn="l" indent="0" marL="0">
                         <a:lnSpc>
-                          <a:spcPts val="2880"/>
+                          <a:spcPts val="3060"/>
                         </a:lnSpc>
                         <a:buNone/>
                       </a:pPr>
                       <a:r>
-                        <a:rPr lang="en-US" sz="2400" dirty="0" spc="1" kern="0">
+                        <a:rPr lang="en-US" sz="2550" dirty="0" spc="0" kern="0">
                           <a:solidFill>
                             <a:srgbClr val="14161C"/>
                           </a:solidFill>
@@ -5540,7 +5540,7 @@
                         <a:t>(không</a:t>
                       </a:r>
                       <a:r>
-                        <a:rPr lang="en-US" sz="2400" dirty="0" spc="-13" kern="0">
+                        <a:rPr lang="en-US" sz="2550" dirty="0" spc="-18" kern="0">
                           <a:solidFill>
                             <a:srgbClr val="14161C"/>
                           </a:solidFill>
@@ -5551,7 +5551,7 @@
                         <a:t> gõ</a:t>
                       </a:r>
                       <a:r>
-                        <a:rPr lang="en-US" sz="2400" dirty="0" spc="3" kern="0">
+                        <a:rPr lang="en-US" sz="2550" dirty="0" spc="0" kern="0">
                           <a:solidFill>
                             <a:srgbClr val="14161C"/>
                           </a:solidFill>
@@ -5564,7 +5564,7 @@
                       <a:endParaRPr lang="en-US" sz="1200" dirty="0"/>
                     </a:p>
                   </a:txBody>
-                  <a:tcPr marL="304800" marR="304800" marT="304800" marB="304800" anchor="ctr">
+                  <a:tcPr marL="304800" marR="304800" marT="300990" marB="300990" anchor="ctr">
                     <a:lnL w="0" cap="flat" cmpd="sng" algn="ctr">
                       <a:noFill/>
                     </a:lnL>
@@ -5595,12 +5595,12 @@
                     <a:p>
                       <a:pPr algn="l" indent="0" marL="0">
                         <a:lnSpc>
-                          <a:spcPts val="2880"/>
+                          <a:spcPts val="3060"/>
                         </a:lnSpc>
                         <a:buNone/>
                       </a:pPr>
                       <a:r>
-                        <a:rPr lang="en-US" sz="2400" dirty="0" spc="-1" kern="0">
+                        <a:rPr lang="en-US" sz="2550" dirty="0" spc="1" kern="0">
                           <a:solidFill>
                             <a:srgbClr val="14161C"/>
                           </a:solidFill>
@@ -5608,10 +5608,10 @@
                           <a:ea typeface="Be Vietnam Pro" pitchFamily="34" charset="-122"/>
                           <a:cs typeface="Be Vietnam Pro" pitchFamily="34" charset="-120"/>
                         </a:rPr>
-                        <a:t>Chỉ namespace</a:t>
+                        <a:t>Chỉ</a:t>
                       </a:r>
                       <a:r>
-                        <a:rPr lang="en-US" sz="2400" dirty="0" spc="0" kern="0">
+                        <a:rPr lang="en-US" sz="2550" dirty="0" spc="-1" kern="0">
                           <a:solidFill>
                             <a:srgbClr val="14161C"/>
                           </a:solidFill>
@@ -5619,10 +5619,10 @@
                           <a:ea typeface="Be Vietnam Pro" pitchFamily="34" charset="-122"/>
                           <a:cs typeface="Be Vietnam Pro" pitchFamily="34" charset="-120"/>
                         </a:rPr>
-                        <a:t> hiện</a:t>
+                        <a:t> namespace hiện</a:t>
                       </a:r>
                       <a:r>
-                        <a:rPr lang="en-US" sz="2400" dirty="0" spc="-10" kern="0">
+                        <a:rPr lang="en-US" sz="2550" dirty="0" spc="-11" kern="0">
                           <a:solidFill>
                             <a:srgbClr val="14161C"/>
                           </a:solidFill>
@@ -5635,7 +5635,7 @@
                       <a:endParaRPr lang="en-US" sz="1200" dirty="0"/>
                     </a:p>
                   </a:txBody>
-                  <a:tcPr marL="304800" marR="304800" marT="304800" marB="304800" anchor="ctr">
+                  <a:tcPr marL="304800" marR="304800" marT="300990" marB="300990" anchor="ctr">
                     <a:lnL w="19050" cap="flat" cmpd="sng" algn="ctr">
                       <a:solidFill>
                         <a:srgbClr val="DDD5C1"/>
@@ -5674,12 +5674,12 @@
                     <a:p>
                       <a:pPr algn="l" indent="0" marL="0">
                         <a:lnSpc>
-                          <a:spcPts val="2880"/>
+                          <a:spcPts val="3060"/>
                         </a:lnSpc>
                         <a:buNone/>
                       </a:pPr>
                       <a:r>
-                        <a:rPr lang="en-US" sz="2400" dirty="0" spc="-2" kern="0">
+                        <a:rPr lang="en-US" sz="2550" dirty="0" spc="0" kern="0">
                           <a:solidFill>
                             <a:srgbClr val="14161C"/>
                           </a:solidFill>
@@ -5690,7 +5690,7 @@
                         <a:t>-n</a:t>
                       </a:r>
                       <a:r>
-                        <a:rPr lang="en-US" sz="2400" dirty="0" spc="0" kern="0">
+                        <a:rPr lang="en-US" sz="2550" dirty="0" spc="-2" kern="0">
                           <a:solidFill>
                             <a:srgbClr val="14161C"/>
                           </a:solidFill>
@@ -5703,7 +5703,7 @@
                       <a:endParaRPr lang="en-US" sz="1200" dirty="0"/>
                     </a:p>
                   </a:txBody>
-                  <a:tcPr marL="304800" marR="304800" marT="304800" marB="304800" anchor="ctr">
+                  <a:tcPr marL="304800" marR="304800" marT="300990" marB="300990" anchor="ctr">
                     <a:lnL w="0" cap="flat" cmpd="sng" algn="ctr">
                       <a:noFill/>
                     </a:lnL>
@@ -5734,12 +5734,12 @@
                     <a:p>
                       <a:pPr algn="l" indent="0" marL="0">
                         <a:lnSpc>
-                          <a:spcPts val="2880"/>
+                          <a:spcPts val="3060"/>
                         </a:lnSpc>
                         <a:buNone/>
                       </a:pPr>
                       <a:r>
-                        <a:rPr lang="en-US" sz="2400" dirty="0" spc="-7" kern="0">
+                        <a:rPr lang="en-US" sz="2550" dirty="0" spc="-7" kern="0">
                           <a:solidFill>
                             <a:srgbClr val="14161C"/>
                           </a:solidFill>
@@ -5750,7 +5750,7 @@
                         <a:t>Một</a:t>
                       </a:r>
                       <a:r>
-                        <a:rPr lang="en-US" sz="2400" dirty="0" spc="-1" kern="0">
+                        <a:rPr lang="en-US" sz="2550" dirty="0" spc="-1" kern="0">
                           <a:solidFill>
                             <a:srgbClr val="14161C"/>
                           </a:solidFill>
@@ -5758,23 +5758,12 @@
                           <a:ea typeface="Be Vietnam Pro" pitchFamily="34" charset="-122"/>
                           <a:cs typeface="Be Vietnam Pro" pitchFamily="34" charset="-120"/>
                         </a:rPr>
-                        <a:t> namespace:</a:t>
-                      </a:r>
-                      <a:r>
-                        <a:rPr lang="en-US" sz="2400" dirty="0" spc="1" kern="0">
-                          <a:solidFill>
-                            <a:srgbClr val="14161C"/>
-                          </a:solidFill>
-                          <a:latin typeface="Be Vietnam Pro" pitchFamily="34" charset="0"/>
-                          <a:ea typeface="Be Vietnam Pro" pitchFamily="34" charset="-122"/>
-                          <a:cs typeface="Be Vietnam Pro" pitchFamily="34" charset="-120"/>
-                        </a:rPr>
-                        <a:t> shop</a:t>
+                        <a:t> namespace: shop</a:t>
                       </a:r>
                       <a:endParaRPr lang="en-US" sz="1200" dirty="0"/>
                     </a:p>
                   </a:txBody>
-                  <a:tcPr marL="304800" marR="304800" marT="304800" marB="304800" anchor="ctr">
+                  <a:tcPr marL="304800" marR="304800" marT="300990" marB="300990" anchor="ctr">
                     <a:lnL w="19050" cap="flat" cmpd="sng" algn="ctr">
                       <a:solidFill>
                         <a:srgbClr val="DDD5C1"/>
@@ -5813,12 +5802,12 @@
                     <a:p>
                       <a:pPr algn="l" indent="0" marL="0">
                         <a:lnSpc>
-                          <a:spcPts val="2880"/>
+                          <a:spcPts val="3060"/>
                         </a:lnSpc>
                         <a:buNone/>
                       </a:pPr>
                       <a:r>
-                        <a:rPr lang="en-US" sz="2400" dirty="0" kern="0">
+                        <a:rPr lang="en-US" sz="2550" dirty="0" spc="1" kern="0">
                           <a:solidFill>
                             <a:srgbClr val="14161C"/>
                           </a:solidFill>
@@ -5831,7 +5820,7 @@
                       <a:endParaRPr lang="en-US" sz="1200" dirty="0"/>
                     </a:p>
                   </a:txBody>
-                  <a:tcPr marL="304800" marR="304800" marT="304800" marB="304800" anchor="ctr">
+                  <a:tcPr marL="304800" marR="304800" marT="300990" marB="300990" anchor="ctr">
                     <a:lnL w="0" cap="flat" cmpd="sng" algn="ctr">
                       <a:noFill/>
                     </a:lnL>
@@ -5862,12 +5851,12 @@
                     <a:p>
                       <a:pPr algn="l" indent="0" marL="0">
                         <a:lnSpc>
-                          <a:spcPts val="2880"/>
+                          <a:spcPts val="3060"/>
                         </a:lnSpc>
                         <a:buNone/>
                       </a:pPr>
                       <a:r>
-                        <a:rPr lang="en-US" sz="2400" dirty="0" spc="-1" kern="0">
+                        <a:rPr lang="en-US" sz="2550" dirty="0" spc="-1" kern="0">
                           <a:solidFill>
                             <a:srgbClr val="14161C"/>
                           </a:solidFill>
@@ -5880,7 +5869,7 @@
                       <a:endParaRPr lang="en-US" sz="1200" dirty="0"/>
                     </a:p>
                   </a:txBody>
-                  <a:tcPr marL="304800" marR="304800" marT="304800" marB="304800" anchor="ctr">
+                  <a:tcPr marL="304800" marR="304800" marT="300990" marB="300990" anchor="ctr">
                     <a:lnL w="19050" cap="flat" cmpd="sng" algn="ctr">
                       <a:solidFill>
                         <a:srgbClr val="DDD5C1"/>
@@ -5919,12 +5908,12 @@
                     <a:p>
                       <a:pPr algn="l" indent="0" marL="0">
                         <a:lnSpc>
-                          <a:spcPts val="2880"/>
+                          <a:spcPts val="3060"/>
                         </a:lnSpc>
                         <a:buNone/>
                       </a:pPr>
                       <a:r>
-                        <a:rPr lang="en-US" sz="2400" dirty="0" spc="-2" kern="0">
+                        <a:rPr lang="en-US" sz="2550" dirty="0" spc="0" kern="0">
                           <a:solidFill>
                             <a:srgbClr val="14161C"/>
                           </a:solidFill>
@@ -5935,7 +5924,7 @@
                         <a:t>-l</a:t>
                       </a:r>
                       <a:r>
-                        <a:rPr lang="en-US" sz="2400" dirty="0" spc="-4" kern="0">
+                        <a:rPr lang="en-US" sz="2550" dirty="0" spc="-5" kern="0">
                           <a:solidFill>
                             <a:srgbClr val="14161C"/>
                           </a:solidFill>
@@ -5948,7 +5937,7 @@
                       <a:endParaRPr lang="en-US" sz="1200" dirty="0"/>
                     </a:p>
                   </a:txBody>
-                  <a:tcPr marL="304800" marR="304800" marT="304800" marB="304800" anchor="ctr">
+                  <a:tcPr marL="304800" marR="304800" marT="300990" marB="300990" anchor="ctr">
                     <a:lnL w="0" cap="flat" cmpd="sng" algn="ctr">
                       <a:noFill/>
                     </a:lnL>
@@ -5979,12 +5968,12 @@
                     <a:p>
                       <a:pPr algn="l" indent="0" marL="0">
                         <a:lnSpc>
-                          <a:spcPts val="2880"/>
+                          <a:spcPts val="3060"/>
                         </a:lnSpc>
                         <a:buNone/>
                       </a:pPr>
                       <a:r>
-                        <a:rPr lang="en-US" sz="2400" dirty="0" spc="-20" kern="0">
+                        <a:rPr lang="en-US" sz="2550" dirty="0" spc="-20" kern="0">
                           <a:solidFill>
                             <a:srgbClr val="14161C"/>
                           </a:solidFill>
@@ -5995,7 +5984,7 @@
                         <a:t>Pod</a:t>
                       </a:r>
                       <a:r>
-                        <a:rPr lang="en-US" sz="2400" dirty="0" spc="1" kern="0">
+                        <a:rPr lang="en-US" sz="2550" dirty="0" spc="0" kern="0">
                           <a:solidFill>
                             <a:srgbClr val="14161C"/>
                           </a:solidFill>
@@ -6006,7 +5995,7 @@
                         <a:t> có nhãn</a:t>
                       </a:r>
                       <a:r>
-                        <a:rPr lang="en-US" sz="2400" dirty="0" spc="-4" kern="0">
+                        <a:rPr lang="en-US" sz="2550" dirty="0" spc="-5" kern="0">
                           <a:solidFill>
                             <a:srgbClr val="14161C"/>
                           </a:solidFill>
@@ -6019,7 +6008,7 @@
                       <a:endParaRPr lang="en-US" sz="1200" dirty="0"/>
                     </a:p>
                   </a:txBody>
-                  <a:tcPr marL="304800" marR="304800" marT="304800" marB="304800" anchor="ctr">
+                  <a:tcPr marL="304800" marR="304800" marT="300990" marB="300990" anchor="ctr">
                     <a:lnL w="19050" cap="flat" cmpd="sng" algn="ctr">
                       <a:solidFill>
                         <a:srgbClr val="DDD5C1"/>
@@ -6058,12 +6047,12 @@
                     <a:p>
                       <a:pPr algn="l" indent="0" marL="0">
                         <a:lnSpc>
-                          <a:spcPts val="2700"/>
+                          <a:spcPts val="3060"/>
                         </a:lnSpc>
                         <a:buNone/>
                       </a:pPr>
                       <a:r>
-                        <a:rPr lang="en-US" sz="2250" dirty="0" spc="2" kern="0">
+                        <a:rPr lang="en-US" sz="2550" dirty="0" spc="0" kern="0">
                           <a:solidFill>
                             <a:srgbClr val="14161C"/>
                           </a:solidFill>
@@ -6071,10 +6060,21 @@
                           <a:ea typeface="Be Vietnam Pro" pitchFamily="34" charset="-122"/>
                           <a:cs typeface="Be Vietnam Pro" pitchFamily="34" charset="-120"/>
                         </a:rPr>
-                        <a:t>-l 'app</a:t>
+                        <a:t>-l</a:t>
                       </a:r>
                       <a:r>
-                        <a:rPr lang="en-US" sz="2250" dirty="0" spc="1" kern="0">
+                        <a:rPr lang="en-US" sz="2550" dirty="0" spc="-1" kern="0">
+                          <a:solidFill>
+                            <a:srgbClr val="14161C"/>
+                          </a:solidFill>
+                          <a:latin typeface="Be Vietnam Pro" pitchFamily="34" charset="0"/>
+                          <a:ea typeface="Be Vietnam Pro" pitchFamily="34" charset="-122"/>
+                          <a:cs typeface="Be Vietnam Pro" pitchFamily="34" charset="-120"/>
+                        </a:rPr>
+                        <a:t> 'app</a:t>
+                      </a:r>
+                      <a:r>
+                        <a:rPr lang="en-US" sz="2550" dirty="0" spc="-2" kern="0">
                           <a:solidFill>
                             <a:srgbClr val="14161C"/>
                           </a:solidFill>
@@ -6085,7 +6085,7 @@
                         <a:t> in</a:t>
                       </a:r>
                       <a:r>
-                        <a:rPr lang="en-US" sz="2250" dirty="0" spc="-7" kern="0">
+                        <a:rPr lang="en-US" sz="2550" dirty="0" spc="-7" kern="0">
                           <a:solidFill>
                             <a:srgbClr val="14161C"/>
                           </a:solidFill>
@@ -6098,7 +6098,7 @@
                       <a:endParaRPr lang="en-US" sz="1200" dirty="0"/>
                     </a:p>
                   </a:txBody>
-                  <a:tcPr marL="304800" marR="304800" marT="304800" marB="304800" anchor="ctr">
+                  <a:tcPr marL="304800" marR="304800" marT="300990" marB="300990" anchor="ctr">
                     <a:lnL w="0" cap="flat" cmpd="sng" algn="ctr">
                       <a:noFill/>
                     </a:lnL>
@@ -6129,12 +6129,12 @@
                     <a:p>
                       <a:pPr algn="l" indent="0" marL="0">
                         <a:lnSpc>
-                          <a:spcPts val="2880"/>
+                          <a:spcPts val="3060"/>
                         </a:lnSpc>
                         <a:buNone/>
                       </a:pPr>
                       <a:r>
-                        <a:rPr lang="en-US" sz="2400" dirty="0" spc="-1" kern="0">
+                        <a:rPr lang="en-US" sz="2550" dirty="0" spc="1" kern="0">
                           <a:solidFill>
                             <a:srgbClr val="14161C"/>
                           </a:solidFill>
@@ -6145,7 +6145,7 @@
                         <a:t>Dấu</a:t>
                       </a:r>
                       <a:r>
-                        <a:rPr lang="en-US" sz="2400" dirty="0" spc="-6" kern="0">
+                        <a:rPr lang="en-US" sz="2550" dirty="0" spc="-8" kern="0">
                           <a:solidFill>
                             <a:srgbClr val="14161C"/>
                           </a:solidFill>
@@ -6156,7 +6156,7 @@
                         <a:t> phẩy</a:t>
                       </a:r>
                       <a:r>
-                        <a:rPr lang="en-US" sz="2400" dirty="0" spc="1" kern="0">
+                        <a:rPr lang="en-US" sz="2550" dirty="0" spc="-1" kern="0">
                           <a:solidFill>
                             <a:srgbClr val="14161C"/>
                           </a:solidFill>
@@ -6167,7 +6167,7 @@
                         <a:t> nối</a:t>
                       </a:r>
                       <a:r>
-                        <a:rPr lang="en-US" sz="2400" dirty="0" spc="18" kern="0">
+                        <a:rPr lang="en-US" sz="2550" dirty="0" spc="22" kern="0">
                           <a:solidFill>
                             <a:srgbClr val="14161C"/>
                           </a:solidFill>
@@ -6178,7 +6178,7 @@
                         <a:t> điều</a:t>
                       </a:r>
                       <a:r>
-                        <a:rPr lang="en-US" sz="2400" dirty="0" spc="-2" kern="0">
+                        <a:rPr lang="en-US" sz="2550" dirty="0" spc="1" kern="0">
                           <a:solidFill>
                             <a:srgbClr val="14161C"/>
                           </a:solidFill>
@@ -6189,7 +6189,7 @@
                         <a:t> kiện:</a:t>
                       </a:r>
                       <a:r>
-                        <a:rPr lang="en-US" sz="2400" dirty="0" spc="-21" kern="0">
+                        <a:rPr lang="en-US" sz="2550" dirty="0" spc="-23" kern="0">
                           <a:solidFill>
                             <a:srgbClr val="14161C"/>
                           </a:solidFill>
@@ -6200,7 +6200,7 @@
                         <a:t> tất</a:t>
                       </a:r>
                       <a:r>
-                        <a:rPr lang="en-US" sz="2400" dirty="0" spc="1" kern="0">
+                        <a:rPr lang="en-US" sz="2550" dirty="0" spc="0" kern="0">
                           <a:solidFill>
                             <a:srgbClr val="14161C"/>
                           </a:solidFill>
@@ -6211,7 +6211,7 @@
                         <a:t> cả phải</a:t>
                       </a:r>
                       <a:r>
-                        <a:rPr lang="en-US" sz="2400" dirty="0" spc="3" kern="0">
+                        <a:rPr lang="en-US" sz="2550" dirty="0" spc="-1" kern="0">
                           <a:solidFill>
                             <a:srgbClr val="14161C"/>
                           </a:solidFill>
@@ -6224,7 +6224,7 @@
                       <a:endParaRPr lang="en-US" sz="1200" dirty="0"/>
                     </a:p>
                   </a:txBody>
-                  <a:tcPr marL="304800" marR="304800" marT="304800" marB="304800" anchor="ctr">
+                  <a:tcPr marL="304800" marR="304800" marT="300990" marB="300990" anchor="ctr">
                     <a:lnL w="19050" cap="flat" cmpd="sng" algn="ctr">
                       <a:solidFill>
                         <a:srgbClr val="DDD5C1"/>
